--- a/docs/architecture/odata-mcp-proxy-architecture.pptx
+++ b/docs/architecture/odata-mcp-proxy-architecture.pptx
@@ -9,9 +9,11 @@
     <p:sldId id="257" r:id="rId3"/>
     <p:sldId id="258" r:id="rId4"/>
     <p:sldId id="259" r:id="rId5"/>
+    <p:sldId id="260" r:id="rId6"/>
+    <p:sldId id="261" r:id="rId7"/>
   </p:sldIdLst>
   <p:notesMasterIdLst>
-    <p:notesMasterId r:id="rId6"/>
+    <p:notesMasterId r:id="rId8"/>
   </p:notesMasterIdLst>
   <p:sldSz cx="12192000" cy="6858000"/>
   <p:notesSz cx="6858000" cy="12192000"/>
@@ -802,6 +804,186 @@
             <a:fld id="{F7021451-1387-4CA6-816F-3879F97B5CBC}" type="slidenum">
               <a:rPr lang="en-US"/>
               <a:t>4</a:t>
+            </a:fld>
+            <a:endParaRPr lang="en-US"/>
+          </a:p>
+        </p:txBody>
+      </p:sp>
+    </p:spTree>
+    <p:extLst>
+      <p:ext uri="{BB962C8B-B14F-4D97-AF65-F5344CB8AC3E}">
+        <p14:creationId xmlns:p14="http://schemas.microsoft.com/office/powerpoint/2010/main" val="1024086991"/>
+      </p:ext>
+    </p:extLst>
+  </p:cSld>
+  <p:clrMapOvr>
+    <a:masterClrMapping/>
+  </p:clrMapOvr>
+</p:notes>
+</file>
+
+<file path=ppt/notesSlides/notesSlide5.xml><?xml version="1.0" encoding="utf-8"?>
+<p:notes xmlns:a="http://schemas.openxmlformats.org/drawingml/2006/main" xmlns:r="http://schemas.openxmlformats.org/officeDocument/2006/relationships" xmlns:p="http://schemas.openxmlformats.org/presentationml/2006/main">
+  <p:cSld>
+    <p:spTree>
+      <p:nvGrpSpPr>
+        <p:cNvPr id="1" name=""/>
+        <p:cNvGrpSpPr/>
+        <p:nvPr/>
+      </p:nvGrpSpPr>
+      <p:grpSpPr>
+        <a:xfrm>
+          <a:off x="0" y="0"/>
+          <a:ext cx="0" cy="0"/>
+          <a:chOff x="0" y="0"/>
+          <a:chExt cx="0" cy="0"/>
+        </a:xfrm>
+      </p:grpSpPr>
+      <p:sp>
+        <p:nvSpPr>
+          <p:cNvPr id="2" name="Slide Image Placeholder 1"/>
+          <p:cNvSpPr>
+            <a:spLocks noGrp="1" noRot="1" noChangeAspect="1"/>
+          </p:cNvSpPr>
+          <p:nvPr>
+            <p:ph type="sldImg"/>
+          </p:nvPr>
+        </p:nvSpPr>
+        <p:spPr/>
+      </p:sp>
+      <p:sp>
+        <p:nvSpPr>
+          <p:cNvPr id="3" name="Notes Placeholder 2"/>
+          <p:cNvSpPr>
+            <a:spLocks noGrp="1"/>
+          </p:cNvSpPr>
+          <p:nvPr>
+            <p:ph type="body" idx="1"/>
+          </p:nvPr>
+        </p:nvSpPr>
+        <p:spPr/>
+        <p:txBody>
+          <a:bodyPr/>
+          <a:lstStyle/>
+          <a:p>
+            <a:r>
+              <a:rPr lang="en-US" dirty="0"/>
+              <a:t>Fully on-premise: no SAP BTP subaccount, Destination service, Connectivity, Cloud Connector or XSUAA. Each SAP system trusts the proxy as SAML bearer assertion issuer.</a:t>
+            </a:r>
+            <a:endParaRPr lang="en-US" dirty="0"/>
+          </a:p>
+        </p:txBody>
+      </p:sp>
+      <p:sp>
+        <p:nvSpPr>
+          <p:cNvPr id="4" name="Slide Number Placeholder 3"/>
+          <p:cNvSpPr>
+            <a:spLocks noGrp="1"/>
+          </p:cNvSpPr>
+          <p:nvPr>
+            <p:ph type="sldNum" sz="quarter" idx="10"/>
+          </p:nvPr>
+        </p:nvSpPr>
+        <p:spPr/>
+        <p:txBody>
+          <a:bodyPr/>
+          <a:lstStyle/>
+          <a:p>
+            <a:fld id="{F7021451-1387-4CA6-816F-3879F97B5CBC}" type="slidenum">
+              <a:rPr lang="en-US"/>
+              <a:t>5</a:t>
+            </a:fld>
+            <a:endParaRPr lang="en-US"/>
+          </a:p>
+        </p:txBody>
+      </p:sp>
+    </p:spTree>
+    <p:extLst>
+      <p:ext uri="{BB962C8B-B14F-4D97-AF65-F5344CB8AC3E}">
+        <p14:creationId xmlns:p14="http://schemas.microsoft.com/office/powerpoint/2010/main" val="1024086991"/>
+      </p:ext>
+    </p:extLst>
+  </p:cSld>
+  <p:clrMapOvr>
+    <a:masterClrMapping/>
+  </p:clrMapOvr>
+</p:notes>
+</file>
+
+<file path=ppt/notesSlides/notesSlide6.xml><?xml version="1.0" encoding="utf-8"?>
+<p:notes xmlns:a="http://schemas.openxmlformats.org/drawingml/2006/main" xmlns:r="http://schemas.openxmlformats.org/officeDocument/2006/relationships" xmlns:p="http://schemas.openxmlformats.org/presentationml/2006/main">
+  <p:cSld>
+    <p:spTree>
+      <p:nvGrpSpPr>
+        <p:cNvPr id="1" name=""/>
+        <p:cNvGrpSpPr/>
+        <p:nvPr/>
+      </p:nvGrpSpPr>
+      <p:grpSpPr>
+        <a:xfrm>
+          <a:off x="0" y="0"/>
+          <a:ext cx="0" cy="0"/>
+          <a:chOff x="0" y="0"/>
+          <a:chExt cx="0" cy="0"/>
+        </a:xfrm>
+      </p:grpSpPr>
+      <p:sp>
+        <p:nvSpPr>
+          <p:cNvPr id="2" name="Slide Image Placeholder 1"/>
+          <p:cNvSpPr>
+            <a:spLocks noGrp="1" noRot="1" noChangeAspect="1"/>
+          </p:cNvSpPr>
+          <p:nvPr>
+            <p:ph type="sldImg"/>
+          </p:nvPr>
+        </p:nvSpPr>
+        <p:spPr/>
+      </p:sp>
+      <p:sp>
+        <p:nvSpPr>
+          <p:cNvPr id="3" name="Notes Placeholder 2"/>
+          <p:cNvSpPr>
+            <a:spLocks noGrp="1"/>
+          </p:cNvSpPr>
+          <p:nvPr>
+            <p:ph type="body" idx="1"/>
+          </p:nvPr>
+        </p:nvSpPr>
+        <p:spPr/>
+        <p:txBody>
+          <a:bodyPr/>
+          <a:lstStyle/>
+          <a:p>
+            <a:r>
+              <a:rPr lang="en-US" dirty="0"/>
+              <a:t>1. MCP request: Clients reach the Node.js server through a reverse proxy that terminates TLS. /mcp requires a bearer token.
+2. Single sign-on with any OIDC IdP: /oauth/* proxies the login to Entra ID, Okta, Keycloak, SAP IAS, … Tokens are verified against the IdP's JWKS.
+3. SAML bearer to SAP: The proxy signs a SAML assertion for the user with the key from the secret store and exchanges it at SAP's OAuth server.
+4. OData as the business user: The S/4HANA call carries the user's own SAP token, so SAP authorizations apply per user. Tokens are cached per user.
+5. More SAP systems: Every ABAP system is a separate destination with its own trust set-up and AUTH_TYPE (per user or technical user).</a:t>
+            </a:r>
+            <a:endParaRPr lang="en-US" dirty="0"/>
+          </a:p>
+        </p:txBody>
+      </p:sp>
+      <p:sp>
+        <p:nvSpPr>
+          <p:cNvPr id="4" name="Slide Number Placeholder 3"/>
+          <p:cNvSpPr>
+            <a:spLocks noGrp="1"/>
+          </p:cNvSpPr>
+          <p:nvPr>
+            <p:ph type="sldNum" sz="quarter" idx="10"/>
+          </p:nvPr>
+        </p:nvSpPr>
+        <p:spPr/>
+        <p:txBody>
+          <a:bodyPr/>
+          <a:lstStyle/>
+          <a:p>
+            <a:fld id="{F7021451-1387-4CA6-816F-3879F97B5CBC}" type="slidenum">
+              <a:rPr lang="en-US"/>
+              <a:t>6</a:t>
             </a:fld>
             <a:endParaRPr lang="en-US"/>
           </a:p>
@@ -4205,7 +4387,7 @@
       </p:pic>
       <p:pic>
         <p:nvPicPr>
-          <p:cNvPr id="87" name="Image 5" descr="Connectivity service icon">    </p:cNvPr>
+          <p:cNvPr id="87" name="Image 5" descr="SAP Cloud Identity icon">    </p:cNvPr>
           <p:cNvPicPr>
             <a:picLocks noChangeAspect="1"/>
           </p:cNvPicPr>
@@ -4219,7 +4401,7 @@
         </p:blipFill>
         <p:spPr>
           <a:xfrm>
-            <a:off x="5914998" y="2336255"/>
+            <a:off x="3277685" y="4782458"/>
             <a:ext cx="198754" cy="198754"/>
           </a:xfrm>
           <a:prstGeom prst="rect">
@@ -4229,7 +4411,7 @@
       </p:pic>
       <p:pic>
         <p:nvPicPr>
-          <p:cNvPr id="88" name="Image 6" descr="SAP Cloud Identity icon">    </p:cNvPr>
+          <p:cNvPr id="88" name="Image 6" descr="SAP BTP Core Services APIs icon">    </p:cNvPr>
           <p:cNvPicPr>
             <a:picLocks noChangeAspect="1"/>
           </p:cNvPicPr>
@@ -4243,7 +4425,7 @@
         </p:blipFill>
         <p:spPr>
           <a:xfrm>
-            <a:off x="3277685" y="4782458"/>
+            <a:off x="5876776" y="5470453"/>
             <a:ext cx="198754" cy="198754"/>
           </a:xfrm>
           <a:prstGeom prst="rect">
@@ -4253,7 +4435,7 @@
       </p:pic>
       <p:pic>
         <p:nvPicPr>
-          <p:cNvPr id="89" name="Image 7" descr="SAP Integration Suite icon">    </p:cNvPr>
+          <p:cNvPr id="89" name="Image 7" descr="SAP Cloud Connector icon">    </p:cNvPr>
           <p:cNvPicPr>
             <a:picLocks noChangeAspect="1"/>
           </p:cNvPicPr>
@@ -4267,7 +4449,7 @@
         </p:blipFill>
         <p:spPr>
           <a:xfrm>
-            <a:off x="5876776" y="4782458"/>
+            <a:off x="9469636" y="2336255"/>
             <a:ext cx="198754" cy="198754"/>
           </a:xfrm>
           <a:prstGeom prst="rect">
@@ -4277,7 +4459,7 @@
       </p:pic>
       <p:pic>
         <p:nvPicPr>
-          <p:cNvPr id="90" name="Image 8" descr="SAP BTP Core Services APIs icon">    </p:cNvPr>
+          <p:cNvPr id="90" name="Image 8" descr="SAP Integration Suite icon">    </p:cNvPr>
           <p:cNvPicPr>
             <a:picLocks noChangeAspect="1"/>
           </p:cNvPicPr>
@@ -4291,7 +4473,7 @@
         </p:blipFill>
         <p:spPr>
           <a:xfrm>
-            <a:off x="5876776" y="5470453"/>
+            <a:off x="5876776" y="4782458"/>
             <a:ext cx="198754" cy="198754"/>
           </a:xfrm>
           <a:prstGeom prst="rect">
@@ -4301,7 +4483,7 @@
       </p:pic>
       <p:pic>
         <p:nvPicPr>
-          <p:cNvPr id="91" name="Image 9" descr="SAP S/4HANA / ABAP icon">    </p:cNvPr>
+          <p:cNvPr id="91" name="Image 9" descr="Connectivity service icon">    </p:cNvPr>
           <p:cNvPicPr>
             <a:picLocks noChangeAspect="1"/>
           </p:cNvPicPr>
@@ -4315,7 +4497,7 @@
         </p:blipFill>
         <p:spPr>
           <a:xfrm>
-            <a:off x="9469636" y="3559357"/>
+            <a:off x="5914998" y="2336255"/>
             <a:ext cx="198754" cy="198754"/>
           </a:xfrm>
           <a:prstGeom prst="rect">
@@ -4325,7 +4507,7 @@
       </p:pic>
       <p:pic>
         <p:nvPicPr>
-          <p:cNvPr id="92" name="Image 10" descr="SAP Cloud Connector icon">    </p:cNvPr>
+          <p:cNvPr id="92" name="Image 10" descr="SAP S/4HANA / ABAP icon">    </p:cNvPr>
           <p:cNvPicPr>
             <a:picLocks noChangeAspect="1"/>
           </p:cNvPicPr>
@@ -4339,7 +4521,7 @@
         </p:blipFill>
         <p:spPr>
           <a:xfrm>
-            <a:off x="9469636" y="2336255"/>
+            <a:off x="9469636" y="3559357"/>
             <a:ext cx="198754" cy="198754"/>
           </a:xfrm>
           <a:prstGeom prst="rect">
@@ -8039,7 +8221,7 @@
       </p:sp>
       <p:pic>
         <p:nvPicPr>
-          <p:cNvPr id="76" name="Image 0" descr="MCP client icon">    </p:cNvPr>
+          <p:cNvPr id="76" name="Image 0" descr="Reverse proxy icon">    </p:cNvPr>
           <p:cNvPicPr>
             <a:picLocks noChangeAspect="1"/>
           </p:cNvPicPr>
@@ -8053,7 +8235,7 @@
         </p:blipFill>
         <p:spPr>
           <a:xfrm>
-            <a:off x="793260" y="1533595"/>
+            <a:off x="3086575" y="1686483"/>
             <a:ext cx="198754" cy="198754"/>
           </a:xfrm>
           <a:prstGeom prst="rect">
@@ -8063,7 +8245,7 @@
       </p:pic>
       <p:pic>
         <p:nvPicPr>
-          <p:cNvPr id="77" name="Image 1" descr="odata-mcp-proxy icon">    </p:cNvPr>
+          <p:cNvPr id="77" name="Image 1" descr="MCP client icon">    </p:cNvPr>
           <p:cNvPicPr>
             <a:picLocks noChangeAspect="1"/>
           </p:cNvPicPr>
@@ -8077,7 +8259,7 @@
         </p:blipFill>
         <p:spPr>
           <a:xfrm>
-            <a:off x="4997671" y="1571817"/>
+            <a:off x="793260" y="1533595"/>
             <a:ext cx="198754" cy="198754"/>
           </a:xfrm>
           <a:prstGeom prst="rect">
@@ -8087,7 +8269,7 @@
       </p:pic>
       <p:pic>
         <p:nvPicPr>
-          <p:cNvPr id="78" name="Image 2" descr="Reverse proxy icon">    </p:cNvPr>
+          <p:cNvPr id="78" name="Image 2" descr="Any OIDC IdP icon">    </p:cNvPr>
           <p:cNvPicPr>
             <a:picLocks noChangeAspect="1"/>
           </p:cNvPicPr>
@@ -8101,7 +8283,7 @@
         </p:blipFill>
         <p:spPr>
           <a:xfrm>
-            <a:off x="3086575" y="1686483"/>
+            <a:off x="793260" y="4820680"/>
             <a:ext cx="198754" cy="198754"/>
           </a:xfrm>
           <a:prstGeom prst="rect">
@@ -8111,7 +8293,7 @@
       </p:pic>
       <p:pic>
         <p:nvPicPr>
-          <p:cNvPr id="79" name="Image 3" descr="Any OIDC IdP icon">    </p:cNvPr>
+          <p:cNvPr id="79" name="Image 3" descr="odata-mcp-proxy icon">    </p:cNvPr>
           <p:cNvPicPr>
             <a:picLocks noChangeAspect="1"/>
           </p:cNvPicPr>
@@ -8125,7 +8307,7 @@
         </p:blipFill>
         <p:spPr>
           <a:xfrm>
-            <a:off x="793260" y="4820680"/>
+            <a:off x="4997671" y="1571817"/>
             <a:ext cx="198754" cy="198754"/>
           </a:xfrm>
           <a:prstGeom prst="rect">
@@ -8135,7 +8317,7 @@
       </p:pic>
       <p:pic>
         <p:nvPicPr>
-          <p:cNvPr id="80" name="Image 4" descr="Secret store icon">    </p:cNvPr>
+          <p:cNvPr id="80" name="Image 4" descr="XSUAA icon">    </p:cNvPr>
           <p:cNvPicPr>
             <a:picLocks noChangeAspect="1"/>
           </p:cNvPicPr>
@@ -8149,7 +8331,7 @@
         </p:blipFill>
         <p:spPr>
           <a:xfrm>
-            <a:off x="4997671" y="3712245"/>
+            <a:off x="9469636" y="1778215"/>
             <a:ext cx="198754" cy="198754"/>
           </a:xfrm>
           <a:prstGeom prst="rect">
@@ -8159,7 +8341,7 @@
       </p:pic>
       <p:pic>
         <p:nvPicPr>
-          <p:cNvPr id="81" name="Image 5" descr="SAP S/4HANA icon">    </p:cNvPr>
+          <p:cNvPr id="81" name="Image 5" descr="Secret store icon">    </p:cNvPr>
           <p:cNvPicPr>
             <a:picLocks noChangeAspect="1"/>
           </p:cNvPicPr>
@@ -8173,7 +8355,7 @@
         </p:blipFill>
         <p:spPr>
           <a:xfrm>
-            <a:off x="7176321" y="3788688"/>
+            <a:off x="4997671" y="3712245"/>
             <a:ext cx="198754" cy="198754"/>
           </a:xfrm>
           <a:prstGeom prst="rect">
@@ -8183,7 +8365,7 @@
       </p:pic>
       <p:pic>
         <p:nvPicPr>
-          <p:cNvPr id="82" name="Image 6" descr="XSUAA icon">    </p:cNvPr>
+          <p:cNvPr id="82" name="Image 6" descr="SAP S/4HANA icon">    </p:cNvPr>
           <p:cNvPicPr>
             <a:picLocks noChangeAspect="1"/>
           </p:cNvPicPr>
@@ -8197,7 +8379,7 @@
         </p:blipFill>
         <p:spPr>
           <a:xfrm>
-            <a:off x="9469636" y="1778215"/>
+            <a:off x="7176321" y="3788688"/>
             <a:ext cx="198754" cy="198754"/>
           </a:xfrm>
           <a:prstGeom prst="rect">
@@ -9314,6 +9496,3531 @@
                 <a:cs typeface="Arial" pitchFamily="34" charset="-120"/>
               </a:rPr>
               <a:t>per-user destinations never fall back to the technical user, and backend tokens are cached per user, never shared.</a:t>
+            </a:r>
+            <a:endParaRPr lang="en-US" sz="1100" dirty="0"/>
+          </a:p>
+        </p:txBody>
+      </p:sp>
+    </p:spTree>
+  </p:cSld>
+  <p:clrMapOvr>
+    <a:masterClrMapping/>
+  </p:clrMapOvr>
+</p:sld>
+</file>
+
+<file path=ppt/slides/slide5.xml><?xml version="1.0" encoding="utf-8"?>
+<p:sld xmlns:a="http://schemas.openxmlformats.org/drawingml/2006/main" xmlns:r="http://schemas.openxmlformats.org/officeDocument/2006/relationships" xmlns:p="http://schemas.openxmlformats.org/presentationml/2006/main">
+  <p:cSld name="Slide 5">
+    <p:bg>
+      <p:bgPr>
+        <a:solidFill>
+          <a:srgbClr val="FFFFFF"/>
+        </a:solidFill>
+      </p:bgPr>
+    </p:bg>
+    <p:spTree>
+      <p:nvGrpSpPr>
+        <p:cNvPr id="1" name=""/>
+        <p:cNvGrpSpPr/>
+        <p:nvPr/>
+      </p:nvGrpSpPr>
+      <p:grpSpPr>
+        <a:xfrm>
+          <a:off x="0" y="0"/>
+          <a:ext cx="0" cy="0"/>
+          <a:chOff x="0" y="0"/>
+          <a:chExt cx="0" cy="0"/>
+        </a:xfrm>
+      </p:grpSpPr>
+      <p:sp>
+        <p:nvSpPr>
+          <p:cNvPr id="2" name="Text 0"/>
+          <p:cNvSpPr txBox="1"/>
+          <p:nvPr/>
+        </p:nvSpPr>
+        <p:spPr>
+          <a:xfrm>
+            <a:off x="548640" y="274320"/>
+            <a:ext cx="11064240" cy="411480"/>
+          </a:xfrm>
+          <a:prstGeom prst="rect">
+            <a:avLst/>
+          </a:prstGeom>
+          <a:noFill/>
+          <a:ln/>
+        </p:spPr>
+        <p:txBody>
+          <a:bodyPr wrap="square" lIns="0" tIns="0" rIns="0" bIns="0" rtlCol="0" anchor="ctr"/>
+          <a:lstStyle/>
+          <a:p>
+            <a:pPr indent="0" marL="0">
+              <a:buNone/>
+            </a:pPr>
+            <a:r>
+              <a:rPr lang="en-US" sz="2200" b="1" dirty="0">
+                <a:solidFill>
+                  <a:srgbClr val="1D2D3E"/>
+                </a:solidFill>
+                <a:latin typeface="Arial" pitchFamily="34" charset="0"/>
+                <a:ea typeface="Arial" pitchFamily="34" charset="-122"/>
+                <a:cs typeface="Arial" pitchFamily="34" charset="-120"/>
+              </a:rPr>
+              <a:t>OData MCP Proxy — fully on-premise, without SAP BTP</a:t>
+            </a:r>
+            <a:endParaRPr lang="en-US" sz="2200" dirty="0"/>
+          </a:p>
+        </p:txBody>
+      </p:sp>
+      <p:sp>
+        <p:nvSpPr>
+          <p:cNvPr id="3" name="Text 1"/>
+          <p:cNvSpPr txBox="1"/>
+          <p:nvPr/>
+        </p:nvSpPr>
+        <p:spPr>
+          <a:xfrm>
+            <a:off x="548640" y="685800"/>
+            <a:ext cx="11064240" cy="256032"/>
+          </a:xfrm>
+          <a:prstGeom prst="rect">
+            <a:avLst/>
+          </a:prstGeom>
+          <a:noFill/>
+          <a:ln/>
+        </p:spPr>
+        <p:txBody>
+          <a:bodyPr wrap="square" lIns="0" tIns="0" rIns="0" bIns="0" rtlCol="0" anchor="ctr"/>
+          <a:lstStyle/>
+          <a:p>
+            <a:pPr indent="0" marL="0">
+              <a:buNone/>
+            </a:pPr>
+            <a:r>
+              <a:rPr lang="en-US" sz="1100" dirty="0">
+                <a:solidFill>
+                  <a:srgbClr val="556B82"/>
+                </a:solidFill>
+                <a:latin typeface="Arial" pitchFamily="34" charset="0"/>
+                <a:ea typeface="Arial" pitchFamily="34" charset="-122"/>
+                <a:cs typeface="Arial" pitchFamily="34" charset="-120"/>
+              </a:rPr>
+              <a:t>Node.js server, any OpenID Connect provider and SAP systems that trust the proxy directly</a:t>
+            </a:r>
+            <a:endParaRPr lang="en-US" sz="1100" dirty="0"/>
+          </a:p>
+        </p:txBody>
+      </p:sp>
+      <p:sp>
+        <p:nvSpPr>
+          <p:cNvPr id="4" name="Shape 2"/>
+          <p:cNvSpPr/>
+          <p:nvPr/>
+        </p:nvSpPr>
+        <p:spPr>
+          <a:xfrm>
+            <a:off x="548640" y="1067288"/>
+            <a:ext cx="1911096" cy="1758208"/>
+          </a:xfrm>
+          <a:prstGeom prst="roundRect">
+            <a:avLst>
+              <a:gd name="adj" fmla="val 5201"/>
+            </a:avLst>
+          </a:prstGeom>
+          <a:solidFill>
+            <a:srgbClr val="F5F6F7"/>
+          </a:solidFill>
+          <a:ln w="15875">
+            <a:solidFill>
+              <a:srgbClr val="475E75"/>
+            </a:solidFill>
+            <a:prstDash val="solid"/>
+          </a:ln>
+        </p:spPr>
+      </p:sp>
+      <p:sp>
+        <p:nvSpPr>
+          <p:cNvPr id="5" name="Text 3"/>
+          <p:cNvSpPr txBox="1"/>
+          <p:nvPr/>
+        </p:nvSpPr>
+        <p:spPr>
+          <a:xfrm>
+            <a:off x="670950" y="1143732"/>
+            <a:ext cx="1712342" cy="198754"/>
+          </a:xfrm>
+          <a:prstGeom prst="rect">
+            <a:avLst/>
+          </a:prstGeom>
+          <a:noFill/>
+          <a:ln/>
+        </p:spPr>
+        <p:txBody>
+          <a:bodyPr wrap="square" lIns="0" tIns="0" rIns="0" bIns="0" rtlCol="0" anchor="ctr"/>
+          <a:lstStyle/>
+          <a:p>
+            <a:pPr indent="0" marL="0">
+              <a:buNone/>
+            </a:pPr>
+            <a:r>
+              <a:rPr lang="en-US" sz="1050" b="1" dirty="0">
+                <a:solidFill>
+                  <a:srgbClr val="1D2D3E"/>
+                </a:solidFill>
+                <a:latin typeface="Arial" pitchFamily="34" charset="0"/>
+                <a:ea typeface="Arial" pitchFamily="34" charset="-122"/>
+                <a:cs typeface="Arial" pitchFamily="34" charset="-120"/>
+              </a:rPr>
+              <a:t>AI clients</a:t>
+            </a:r>
+            <a:endParaRPr lang="en-US" sz="1050" dirty="0"/>
+          </a:p>
+        </p:txBody>
+      </p:sp>
+      <p:sp>
+        <p:nvSpPr>
+          <p:cNvPr id="6" name="Shape 4"/>
+          <p:cNvSpPr/>
+          <p:nvPr/>
+        </p:nvSpPr>
+        <p:spPr>
+          <a:xfrm>
+            <a:off x="701528" y="1449507"/>
+            <a:ext cx="1605321" cy="1146658"/>
+          </a:xfrm>
+          <a:prstGeom prst="roundRect">
+            <a:avLst>
+              <a:gd name="adj" fmla="val 4785"/>
+            </a:avLst>
+          </a:prstGeom>
+          <a:solidFill>
+            <a:srgbClr val="FFFFFF"/>
+          </a:solidFill>
+          <a:ln w="9525">
+            <a:solidFill>
+              <a:srgbClr val="475E75"/>
+            </a:solidFill>
+            <a:prstDash val="solid"/>
+          </a:ln>
+        </p:spPr>
+      </p:sp>
+      <p:sp>
+        <p:nvSpPr>
+          <p:cNvPr id="7" name="Text 5"/>
+          <p:cNvSpPr txBox="1"/>
+          <p:nvPr/>
+        </p:nvSpPr>
+        <p:spPr>
+          <a:xfrm>
+            <a:off x="1053169" y="1525951"/>
+            <a:ext cx="1192524" cy="214043"/>
+          </a:xfrm>
+          <a:prstGeom prst="rect">
+            <a:avLst/>
+          </a:prstGeom>
+          <a:noFill/>
+          <a:ln/>
+        </p:spPr>
+        <p:txBody>
+          <a:bodyPr wrap="square" lIns="0" tIns="0" rIns="0" bIns="0" rtlCol="0" anchor="ctr"/>
+          <a:lstStyle/>
+          <a:p>
+            <a:pPr indent="0" marL="0">
+              <a:buNone/>
+            </a:pPr>
+            <a:r>
+              <a:rPr lang="en-US" sz="1000" b="1" dirty="0">
+                <a:solidFill>
+                  <a:srgbClr val="1D2D3E"/>
+                </a:solidFill>
+                <a:latin typeface="Arial" pitchFamily="34" charset="0"/>
+                <a:ea typeface="Arial" pitchFamily="34" charset="-122"/>
+                <a:cs typeface="Arial" pitchFamily="34" charset="-120"/>
+              </a:rPr>
+              <a:t>MCP client</a:t>
+            </a:r>
+            <a:endParaRPr lang="en-US" sz="1000" dirty="0"/>
+          </a:p>
+        </p:txBody>
+      </p:sp>
+      <p:sp>
+        <p:nvSpPr>
+          <p:cNvPr id="8" name="Text 6"/>
+          <p:cNvSpPr txBox="1"/>
+          <p:nvPr/>
+        </p:nvSpPr>
+        <p:spPr>
+          <a:xfrm>
+            <a:off x="808549" y="1785860"/>
+            <a:ext cx="1437144" cy="458663"/>
+          </a:xfrm>
+          <a:prstGeom prst="rect">
+            <a:avLst/>
+          </a:prstGeom>
+          <a:noFill/>
+          <a:ln/>
+        </p:spPr>
+        <p:txBody>
+          <a:bodyPr wrap="square" lIns="0" tIns="0" rIns="0" bIns="0" rtlCol="0" anchor="t"/>
+          <a:lstStyle/>
+          <a:p>
+            <a:pPr indent="0" marL="0">
+              <a:lnSpc>
+                <a:spcPct val="105000"/>
+              </a:lnSpc>
+              <a:buNone/>
+            </a:pPr>
+            <a:r>
+              <a:rPr lang="en-US" sz="850" dirty="0">
+                <a:solidFill>
+                  <a:srgbClr val="556B82"/>
+                </a:solidFill>
+                <a:latin typeface="Arial" pitchFamily="34" charset="0"/>
+                <a:ea typeface="Arial" pitchFamily="34" charset="-122"/>
+                <a:cs typeface="Arial" pitchFamily="34" charset="-120"/>
+              </a:rPr>
+              <a:t>Claude, Copilot Studio,</a:t>
+            </a:r>
+            <a:endParaRPr lang="en-US" sz="850" dirty="0"/>
+          </a:p>
+          <a:p>
+            <a:pPr indent="0" marL="0">
+              <a:lnSpc>
+                <a:spcPct val="105000"/>
+              </a:lnSpc>
+              <a:buNone/>
+            </a:pPr>
+            <a:r>
+              <a:rPr lang="en-US" sz="850" dirty="0">
+                <a:solidFill>
+                  <a:srgbClr val="556B82"/>
+                </a:solidFill>
+                <a:latin typeface="Arial" pitchFamily="34" charset="0"/>
+                <a:ea typeface="Arial" pitchFamily="34" charset="-122"/>
+                <a:cs typeface="Arial" pitchFamily="34" charset="-120"/>
+              </a:rPr>
+              <a:t>MCP Inspector, …</a:t>
+            </a:r>
+            <a:endParaRPr lang="en-US" sz="850" dirty="0"/>
+          </a:p>
+          <a:p>
+            <a:pPr indent="0" marL="0">
+              <a:lnSpc>
+                <a:spcPct val="105000"/>
+              </a:lnSpc>
+              <a:buNone/>
+            </a:pPr>
+            <a:r>
+              <a:rPr lang="en-US" sz="850" dirty="0">
+                <a:solidFill>
+                  <a:srgbClr val="556B82"/>
+                </a:solidFill>
+                <a:latin typeface="Arial" pitchFamily="34" charset="0"/>
+                <a:ea typeface="Arial" pitchFamily="34" charset="-122"/>
+                <a:cs typeface="Arial" pitchFamily="34" charset="-120"/>
+              </a:rPr>
+              <a:t>Streamable HTTP + OAuth</a:t>
+            </a:r>
+            <a:endParaRPr lang="en-US" sz="850" dirty="0"/>
+          </a:p>
+        </p:txBody>
+      </p:sp>
+      <p:sp>
+        <p:nvSpPr>
+          <p:cNvPr id="9" name="Shape 7"/>
+          <p:cNvSpPr/>
+          <p:nvPr/>
+        </p:nvSpPr>
+        <p:spPr>
+          <a:xfrm>
+            <a:off x="548640" y="4354373"/>
+            <a:ext cx="1911096" cy="1452433"/>
+          </a:xfrm>
+          <a:prstGeom prst="roundRect">
+            <a:avLst>
+              <a:gd name="adj" fmla="val 6296"/>
+            </a:avLst>
+          </a:prstGeom>
+          <a:solidFill>
+            <a:srgbClr val="F5F6F7"/>
+          </a:solidFill>
+          <a:ln w="15875">
+            <a:solidFill>
+              <a:srgbClr val="475E75"/>
+            </a:solidFill>
+            <a:prstDash val="solid"/>
+          </a:ln>
+        </p:spPr>
+      </p:sp>
+      <p:sp>
+        <p:nvSpPr>
+          <p:cNvPr id="10" name="Text 8"/>
+          <p:cNvSpPr txBox="1"/>
+          <p:nvPr/>
+        </p:nvSpPr>
+        <p:spPr>
+          <a:xfrm>
+            <a:off x="670950" y="4430817"/>
+            <a:ext cx="1712342" cy="198754"/>
+          </a:xfrm>
+          <a:prstGeom prst="rect">
+            <a:avLst/>
+          </a:prstGeom>
+          <a:noFill/>
+          <a:ln/>
+        </p:spPr>
+        <p:txBody>
+          <a:bodyPr wrap="square" lIns="0" tIns="0" rIns="0" bIns="0" rtlCol="0" anchor="ctr"/>
+          <a:lstStyle/>
+          <a:p>
+            <a:pPr indent="0" marL="0">
+              <a:buNone/>
+            </a:pPr>
+            <a:r>
+              <a:rPr lang="en-US" sz="1050" b="1" dirty="0">
+                <a:solidFill>
+                  <a:srgbClr val="1D2D3E"/>
+                </a:solidFill>
+                <a:latin typeface="Arial" pitchFamily="34" charset="0"/>
+                <a:ea typeface="Arial" pitchFamily="34" charset="-122"/>
+                <a:cs typeface="Arial" pitchFamily="34" charset="-120"/>
+              </a:rPr>
+              <a:t>OpenID Connect provider</a:t>
+            </a:r>
+            <a:endParaRPr lang="en-US" sz="1050" dirty="0"/>
+          </a:p>
+        </p:txBody>
+      </p:sp>
+      <p:sp>
+        <p:nvSpPr>
+          <p:cNvPr id="11" name="Shape 9"/>
+          <p:cNvSpPr/>
+          <p:nvPr/>
+        </p:nvSpPr>
+        <p:spPr>
+          <a:xfrm>
+            <a:off x="701528" y="4736592"/>
+            <a:ext cx="1605321" cy="840882"/>
+          </a:xfrm>
+          <a:prstGeom prst="roundRect">
+            <a:avLst>
+              <a:gd name="adj" fmla="val 6525"/>
+            </a:avLst>
+          </a:prstGeom>
+          <a:solidFill>
+            <a:srgbClr val="FFFFFF"/>
+          </a:solidFill>
+          <a:ln w="9525">
+            <a:solidFill>
+              <a:srgbClr val="475E75"/>
+            </a:solidFill>
+            <a:prstDash val="solid"/>
+          </a:ln>
+        </p:spPr>
+      </p:sp>
+      <p:sp>
+        <p:nvSpPr>
+          <p:cNvPr id="12" name="Text 10"/>
+          <p:cNvSpPr txBox="1"/>
+          <p:nvPr/>
+        </p:nvSpPr>
+        <p:spPr>
+          <a:xfrm>
+            <a:off x="1053169" y="4813036"/>
+            <a:ext cx="1192524" cy="214043"/>
+          </a:xfrm>
+          <a:prstGeom prst="rect">
+            <a:avLst/>
+          </a:prstGeom>
+          <a:noFill/>
+          <a:ln/>
+        </p:spPr>
+        <p:txBody>
+          <a:bodyPr wrap="square" lIns="0" tIns="0" rIns="0" bIns="0" rtlCol="0" anchor="ctr"/>
+          <a:lstStyle/>
+          <a:p>
+            <a:pPr indent="0" marL="0">
+              <a:buNone/>
+            </a:pPr>
+            <a:r>
+              <a:rPr lang="en-US" sz="1000" b="1" dirty="0">
+                <a:solidFill>
+                  <a:srgbClr val="1D2D3E"/>
+                </a:solidFill>
+                <a:latin typeface="Arial" pitchFamily="34" charset="0"/>
+                <a:ea typeface="Arial" pitchFamily="34" charset="-122"/>
+                <a:cs typeface="Arial" pitchFamily="34" charset="-120"/>
+              </a:rPr>
+              <a:t>Any OIDC IdP</a:t>
+            </a:r>
+            <a:endParaRPr lang="en-US" sz="1000" dirty="0"/>
+          </a:p>
+        </p:txBody>
+      </p:sp>
+      <p:sp>
+        <p:nvSpPr>
+          <p:cNvPr id="13" name="Text 11"/>
+          <p:cNvSpPr txBox="1"/>
+          <p:nvPr/>
+        </p:nvSpPr>
+        <p:spPr>
+          <a:xfrm>
+            <a:off x="808549" y="5072945"/>
+            <a:ext cx="1437144" cy="321064"/>
+          </a:xfrm>
+          <a:prstGeom prst="rect">
+            <a:avLst/>
+          </a:prstGeom>
+          <a:noFill/>
+          <a:ln/>
+        </p:spPr>
+        <p:txBody>
+          <a:bodyPr wrap="square" lIns="0" tIns="0" rIns="0" bIns="0" rtlCol="0" anchor="t"/>
+          <a:lstStyle/>
+          <a:p>
+            <a:pPr indent="0" marL="0">
+              <a:lnSpc>
+                <a:spcPct val="105000"/>
+              </a:lnSpc>
+              <a:buNone/>
+            </a:pPr>
+            <a:r>
+              <a:rPr lang="en-US" sz="850" dirty="0">
+                <a:solidFill>
+                  <a:srgbClr val="556B82"/>
+                </a:solidFill>
+                <a:latin typeface="Arial" pitchFamily="34" charset="0"/>
+                <a:ea typeface="Arial" pitchFamily="34" charset="-122"/>
+                <a:cs typeface="Arial" pitchFamily="34" charset="-120"/>
+              </a:rPr>
+              <a:t>Entra ID, Okta, Keycloak,</a:t>
+            </a:r>
+            <a:endParaRPr lang="en-US" sz="850" dirty="0"/>
+          </a:p>
+          <a:p>
+            <a:pPr indent="0" marL="0">
+              <a:lnSpc>
+                <a:spcPct val="105000"/>
+              </a:lnSpc>
+              <a:buNone/>
+            </a:pPr>
+            <a:r>
+              <a:rPr lang="en-US" sz="850" dirty="0">
+                <a:solidFill>
+                  <a:srgbClr val="556B82"/>
+                </a:solidFill>
+                <a:latin typeface="Arial" pitchFamily="34" charset="0"/>
+                <a:ea typeface="Arial" pitchFamily="34" charset="-122"/>
+                <a:cs typeface="Arial" pitchFamily="34" charset="-120"/>
+              </a:rPr>
+              <a:t>SAP IAS, Auth0, …</a:t>
+            </a:r>
+            <a:endParaRPr lang="en-US" sz="850" dirty="0"/>
+          </a:p>
+        </p:txBody>
+      </p:sp>
+      <p:sp>
+        <p:nvSpPr>
+          <p:cNvPr id="14" name="Shape 12"/>
+          <p:cNvSpPr/>
+          <p:nvPr/>
+        </p:nvSpPr>
+        <p:spPr>
+          <a:xfrm>
+            <a:off x="2765511" y="914400"/>
+            <a:ext cx="8791042" cy="4968850"/>
+          </a:xfrm>
+          <a:prstGeom prst="roundRect">
+            <a:avLst>
+              <a:gd name="adj" fmla="val 1840"/>
+            </a:avLst>
+          </a:prstGeom>
+          <a:solidFill>
+            <a:srgbClr val="F5F6F7"/>
+          </a:solidFill>
+          <a:ln w="15875">
+            <a:solidFill>
+              <a:srgbClr val="475E75"/>
+            </a:solidFill>
+            <a:prstDash val="solid"/>
+          </a:ln>
+        </p:spPr>
+      </p:sp>
+      <p:sp>
+        <p:nvSpPr>
+          <p:cNvPr id="15" name="Text 13"/>
+          <p:cNvSpPr txBox="1"/>
+          <p:nvPr/>
+        </p:nvSpPr>
+        <p:spPr>
+          <a:xfrm>
+            <a:off x="2887822" y="990844"/>
+            <a:ext cx="8592288" cy="198754"/>
+          </a:xfrm>
+          <a:prstGeom prst="rect">
+            <a:avLst/>
+          </a:prstGeom>
+          <a:noFill/>
+          <a:ln/>
+        </p:spPr>
+        <p:txBody>
+          <a:bodyPr wrap="square" lIns="0" tIns="0" rIns="0" bIns="0" rtlCol="0" anchor="ctr"/>
+          <a:lstStyle/>
+          <a:p>
+            <a:pPr indent="0" marL="0">
+              <a:buNone/>
+            </a:pPr>
+            <a:r>
+              <a:rPr lang="en-US" sz="1050" b="1" dirty="0">
+                <a:solidFill>
+                  <a:srgbClr val="1D2D3E"/>
+                </a:solidFill>
+                <a:latin typeface="Arial" pitchFamily="34" charset="0"/>
+                <a:ea typeface="Arial" pitchFamily="34" charset="-122"/>
+                <a:cs typeface="Arial" pitchFamily="34" charset="-120"/>
+              </a:rPr>
+              <a:t>Customer data center / private network</a:t>
+            </a:r>
+            <a:endParaRPr lang="en-US" sz="1050" dirty="0"/>
+          </a:p>
+        </p:txBody>
+      </p:sp>
+      <p:sp>
+        <p:nvSpPr>
+          <p:cNvPr id="16" name="Shape 14"/>
+          <p:cNvSpPr/>
+          <p:nvPr/>
+        </p:nvSpPr>
+        <p:spPr>
+          <a:xfrm>
+            <a:off x="2994843" y="1602395"/>
+            <a:ext cx="1528877" cy="840882"/>
+          </a:xfrm>
+          <a:prstGeom prst="roundRect">
+            <a:avLst>
+              <a:gd name="adj" fmla="val 6525"/>
+            </a:avLst>
+          </a:prstGeom>
+          <a:solidFill>
+            <a:srgbClr val="FFFFFF"/>
+          </a:solidFill>
+          <a:ln w="9525">
+            <a:solidFill>
+              <a:srgbClr val="475E75"/>
+            </a:solidFill>
+            <a:prstDash val="solid"/>
+          </a:ln>
+        </p:spPr>
+      </p:sp>
+      <p:sp>
+        <p:nvSpPr>
+          <p:cNvPr id="17" name="Text 15"/>
+          <p:cNvSpPr txBox="1"/>
+          <p:nvPr/>
+        </p:nvSpPr>
+        <p:spPr>
+          <a:xfrm>
+            <a:off x="3346485" y="1678838"/>
+            <a:ext cx="1116080" cy="214043"/>
+          </a:xfrm>
+          <a:prstGeom prst="rect">
+            <a:avLst/>
+          </a:prstGeom>
+          <a:noFill/>
+          <a:ln/>
+        </p:spPr>
+        <p:txBody>
+          <a:bodyPr wrap="square" lIns="0" tIns="0" rIns="0" bIns="0" rtlCol="0" anchor="ctr"/>
+          <a:lstStyle/>
+          <a:p>
+            <a:pPr indent="0" marL="0">
+              <a:buNone/>
+            </a:pPr>
+            <a:r>
+              <a:rPr lang="en-US" sz="1000" b="1" dirty="0">
+                <a:solidFill>
+                  <a:srgbClr val="1D2D3E"/>
+                </a:solidFill>
+                <a:latin typeface="Arial" pitchFamily="34" charset="0"/>
+                <a:ea typeface="Arial" pitchFamily="34" charset="-122"/>
+                <a:cs typeface="Arial" pitchFamily="34" charset="-120"/>
+              </a:rPr>
+              <a:t>Reverse proxy</a:t>
+            </a:r>
+            <a:endParaRPr lang="en-US" sz="1000" dirty="0"/>
+          </a:p>
+        </p:txBody>
+      </p:sp>
+      <p:sp>
+        <p:nvSpPr>
+          <p:cNvPr id="18" name="Text 16"/>
+          <p:cNvSpPr txBox="1"/>
+          <p:nvPr/>
+        </p:nvSpPr>
+        <p:spPr>
+          <a:xfrm>
+            <a:off x="3101864" y="1938747"/>
+            <a:ext cx="1360700" cy="321064"/>
+          </a:xfrm>
+          <a:prstGeom prst="rect">
+            <a:avLst/>
+          </a:prstGeom>
+          <a:noFill/>
+          <a:ln/>
+        </p:spPr>
+        <p:txBody>
+          <a:bodyPr wrap="square" lIns="0" tIns="0" rIns="0" bIns="0" rtlCol="0" anchor="t"/>
+          <a:lstStyle/>
+          <a:p>
+            <a:pPr indent="0" marL="0">
+              <a:lnSpc>
+                <a:spcPct val="105000"/>
+              </a:lnSpc>
+              <a:buNone/>
+            </a:pPr>
+            <a:r>
+              <a:rPr lang="en-US" sz="850" dirty="0">
+                <a:solidFill>
+                  <a:srgbClr val="556B82"/>
+                </a:solidFill>
+                <a:latin typeface="Arial" pitchFamily="34" charset="0"/>
+                <a:ea typeface="Arial" pitchFamily="34" charset="-122"/>
+                <a:cs typeface="Arial" pitchFamily="34" charset="-120"/>
+              </a:rPr>
+              <a:t>HTTPS / TLS termination</a:t>
+            </a:r>
+            <a:endParaRPr lang="en-US" sz="850" dirty="0"/>
+          </a:p>
+          <a:p>
+            <a:pPr indent="0" marL="0">
+              <a:lnSpc>
+                <a:spcPct val="105000"/>
+              </a:lnSpc>
+              <a:buNone/>
+            </a:pPr>
+            <a:r>
+              <a:rPr lang="en-US" sz="850" dirty="0">
+                <a:solidFill>
+                  <a:srgbClr val="556B82"/>
+                </a:solidFill>
+                <a:latin typeface="Arial" pitchFamily="34" charset="0"/>
+                <a:ea typeface="Arial" pitchFamily="34" charset="-122"/>
+                <a:cs typeface="Arial" pitchFamily="34" charset="-120"/>
+              </a:rPr>
+              <a:t>nginx, IIS, Caddy, …</a:t>
+            </a:r>
+            <a:endParaRPr lang="en-US" sz="850" dirty="0"/>
+          </a:p>
+        </p:txBody>
+      </p:sp>
+      <p:sp>
+        <p:nvSpPr>
+          <p:cNvPr id="19" name="Shape 17"/>
+          <p:cNvSpPr/>
+          <p:nvPr/>
+        </p:nvSpPr>
+        <p:spPr>
+          <a:xfrm>
+            <a:off x="4905939" y="1487729"/>
+            <a:ext cx="1987540" cy="1719986"/>
+          </a:xfrm>
+          <a:prstGeom prst="roundRect">
+            <a:avLst>
+              <a:gd name="adj" fmla="val 3190"/>
+            </a:avLst>
+          </a:prstGeom>
+          <a:solidFill>
+            <a:srgbClr val="FFFFFF"/>
+          </a:solidFill>
+          <a:ln w="9525">
+            <a:solidFill>
+              <a:srgbClr val="475E75"/>
+            </a:solidFill>
+            <a:prstDash val="solid"/>
+          </a:ln>
+        </p:spPr>
+      </p:sp>
+      <p:sp>
+        <p:nvSpPr>
+          <p:cNvPr id="20" name="Text 18"/>
+          <p:cNvSpPr txBox="1"/>
+          <p:nvPr/>
+        </p:nvSpPr>
+        <p:spPr>
+          <a:xfrm>
+            <a:off x="5257581" y="1564173"/>
+            <a:ext cx="1574743" cy="214043"/>
+          </a:xfrm>
+          <a:prstGeom prst="rect">
+            <a:avLst/>
+          </a:prstGeom>
+          <a:noFill/>
+          <a:ln/>
+        </p:spPr>
+        <p:txBody>
+          <a:bodyPr wrap="square" lIns="0" tIns="0" rIns="0" bIns="0" rtlCol="0" anchor="ctr"/>
+          <a:lstStyle/>
+          <a:p>
+            <a:pPr indent="0" marL="0">
+              <a:buNone/>
+            </a:pPr>
+            <a:r>
+              <a:rPr lang="en-US" sz="1000" b="1" dirty="0">
+                <a:solidFill>
+                  <a:srgbClr val="1D2D3E"/>
+                </a:solidFill>
+                <a:latin typeface="Arial" pitchFamily="34" charset="0"/>
+                <a:ea typeface="Arial" pitchFamily="34" charset="-122"/>
+                <a:cs typeface="Arial" pitchFamily="34" charset="-120"/>
+              </a:rPr>
+              <a:t>odata-mcp-proxy</a:t>
+            </a:r>
+            <a:endParaRPr lang="en-US" sz="1000" dirty="0"/>
+          </a:p>
+        </p:txBody>
+      </p:sp>
+      <p:sp>
+        <p:nvSpPr>
+          <p:cNvPr id="21" name="Text 19"/>
+          <p:cNvSpPr txBox="1"/>
+          <p:nvPr/>
+        </p:nvSpPr>
+        <p:spPr>
+          <a:xfrm>
+            <a:off x="5012960" y="1824082"/>
+            <a:ext cx="1819363" cy="871460"/>
+          </a:xfrm>
+          <a:prstGeom prst="rect">
+            <a:avLst/>
+          </a:prstGeom>
+          <a:noFill/>
+          <a:ln/>
+        </p:spPr>
+        <p:txBody>
+          <a:bodyPr wrap="square" lIns="0" tIns="0" rIns="0" bIns="0" rtlCol="0" anchor="t"/>
+          <a:lstStyle/>
+          <a:p>
+            <a:pPr indent="0" marL="0">
+              <a:lnSpc>
+                <a:spcPct val="105000"/>
+              </a:lnSpc>
+              <a:buNone/>
+            </a:pPr>
+            <a:r>
+              <a:rPr lang="en-US" sz="850" dirty="0">
+                <a:solidFill>
+                  <a:srgbClr val="556B82"/>
+                </a:solidFill>
+                <a:latin typeface="Arial" pitchFamily="34" charset="0"/>
+                <a:ea typeface="Arial" pitchFamily="34" charset="-122"/>
+                <a:cs typeface="Arial" pitchFamily="34" charset="-120"/>
+              </a:rPr>
+              <a:t>Node.js server (systemd, Docker)</a:t>
+            </a:r>
+            <a:endParaRPr lang="en-US" sz="850" dirty="0"/>
+          </a:p>
+          <a:p>
+            <a:pPr indent="0" marL="0">
+              <a:lnSpc>
+                <a:spcPct val="105000"/>
+              </a:lnSpc>
+              <a:buNone/>
+            </a:pPr>
+            <a:r>
+              <a:rPr lang="en-US" sz="850" dirty="0">
+                <a:solidFill>
+                  <a:srgbClr val="556B82"/>
+                </a:solidFill>
+                <a:latin typeface="Arial" pitchFamily="34" charset="0"/>
+                <a:ea typeface="Arial" pitchFamily="34" charset="-122"/>
+                <a:cs typeface="Arial" pitchFamily="34" charset="-120"/>
+              </a:rPr>
+              <a:t>/mcp  Streamable HTTP</a:t>
+            </a:r>
+            <a:endParaRPr lang="en-US" sz="850" dirty="0"/>
+          </a:p>
+          <a:p>
+            <a:pPr indent="0" marL="0">
+              <a:lnSpc>
+                <a:spcPct val="105000"/>
+              </a:lnSpc>
+              <a:buNone/>
+            </a:pPr>
+            <a:r>
+              <a:rPr lang="en-US" sz="850" dirty="0">
+                <a:solidFill>
+                  <a:srgbClr val="556B82"/>
+                </a:solidFill>
+                <a:latin typeface="Arial" pitchFamily="34" charset="0"/>
+                <a:ea typeface="Arial" pitchFamily="34" charset="-122"/>
+                <a:cs typeface="Arial" pitchFamily="34" charset="-120"/>
+              </a:rPr>
+              <a:t>/oauth/*  OAuth proxy</a:t>
+            </a:r>
+            <a:endParaRPr lang="en-US" sz="850" dirty="0"/>
+          </a:p>
+          <a:p>
+            <a:pPr indent="0" marL="0">
+              <a:lnSpc>
+                <a:spcPct val="105000"/>
+              </a:lnSpc>
+              <a:buNone/>
+            </a:pPr>
+            <a:r>
+              <a:rPr lang="en-US" sz="850" dirty="0">
+                <a:solidFill>
+                  <a:srgbClr val="556B82"/>
+                </a:solidFill>
+                <a:latin typeface="Arial" pitchFamily="34" charset="0"/>
+                <a:ea typeface="Arial" pitchFamily="34" charset="-122"/>
+                <a:cs typeface="Arial" pitchFamily="34" charset="-120"/>
+              </a:rPr>
+              <a:t>OIDC JWT validation (JWKS)</a:t>
+            </a:r>
+            <a:endParaRPr lang="en-US" sz="850" dirty="0"/>
+          </a:p>
+          <a:p>
+            <a:pPr indent="0" marL="0">
+              <a:lnSpc>
+                <a:spcPct val="105000"/>
+              </a:lnSpc>
+              <a:buNone/>
+            </a:pPr>
+            <a:r>
+              <a:rPr lang="en-US" sz="850" dirty="0">
+                <a:solidFill>
+                  <a:srgbClr val="556B82"/>
+                </a:solidFill>
+                <a:latin typeface="Arial" pitchFamily="34" charset="0"/>
+                <a:ea typeface="Arial" pitchFamily="34" charset="-122"/>
+                <a:cs typeface="Arial" pitchFamily="34" charset="-120"/>
+              </a:rPr>
+              <a:t>Per-user token cache</a:t>
+            </a:r>
+            <a:endParaRPr lang="en-US" sz="850" dirty="0"/>
+          </a:p>
+          <a:p>
+            <a:pPr indent="0" marL="0">
+              <a:lnSpc>
+                <a:spcPct val="105000"/>
+              </a:lnSpc>
+              <a:buNone/>
+            </a:pPr>
+            <a:r>
+              <a:rPr lang="en-US" sz="850" dirty="0">
+                <a:solidFill>
+                  <a:srgbClr val="556B82"/>
+                </a:solidFill>
+                <a:latin typeface="Arial" pitchFamily="34" charset="0"/>
+                <a:ea typeface="Arial" pitchFamily="34" charset="-122"/>
+                <a:cs typeface="Arial" pitchFamily="34" charset="-120"/>
+              </a:rPr>
+              <a:t>SAML assertion signing</a:t>
+            </a:r>
+            <a:endParaRPr lang="en-US" sz="850" dirty="0"/>
+          </a:p>
+        </p:txBody>
+      </p:sp>
+      <p:sp>
+        <p:nvSpPr>
+          <p:cNvPr id="22" name="Shape 20"/>
+          <p:cNvSpPr/>
+          <p:nvPr/>
+        </p:nvSpPr>
+        <p:spPr>
+          <a:xfrm>
+            <a:off x="4905939" y="3628156"/>
+            <a:ext cx="1528877" cy="687995"/>
+          </a:xfrm>
+          <a:prstGeom prst="roundRect">
+            <a:avLst>
+              <a:gd name="adj" fmla="val 7974"/>
+            </a:avLst>
+          </a:prstGeom>
+          <a:solidFill>
+            <a:srgbClr val="FFFFFF"/>
+          </a:solidFill>
+          <a:ln w="9525">
+            <a:solidFill>
+              <a:srgbClr val="475E75"/>
+            </a:solidFill>
+            <a:prstDash val="solid"/>
+          </a:ln>
+        </p:spPr>
+      </p:sp>
+      <p:sp>
+        <p:nvSpPr>
+          <p:cNvPr id="23" name="Text 21"/>
+          <p:cNvSpPr txBox="1"/>
+          <p:nvPr/>
+        </p:nvSpPr>
+        <p:spPr>
+          <a:xfrm>
+            <a:off x="5257581" y="3704600"/>
+            <a:ext cx="1116080" cy="214043"/>
+          </a:xfrm>
+          <a:prstGeom prst="rect">
+            <a:avLst/>
+          </a:prstGeom>
+          <a:noFill/>
+          <a:ln/>
+        </p:spPr>
+        <p:txBody>
+          <a:bodyPr wrap="square" lIns="0" tIns="0" rIns="0" bIns="0" rtlCol="0" anchor="ctr"/>
+          <a:lstStyle/>
+          <a:p>
+            <a:pPr indent="0" marL="0">
+              <a:buNone/>
+            </a:pPr>
+            <a:r>
+              <a:rPr lang="en-US" sz="1000" b="1" dirty="0">
+                <a:solidFill>
+                  <a:srgbClr val="1D2D3E"/>
+                </a:solidFill>
+                <a:latin typeface="Arial" pitchFamily="34" charset="0"/>
+                <a:ea typeface="Arial" pitchFamily="34" charset="-122"/>
+                <a:cs typeface="Arial" pitchFamily="34" charset="-120"/>
+              </a:rPr>
+              <a:t>Secret store</a:t>
+            </a:r>
+            <a:endParaRPr lang="en-US" sz="1000" dirty="0"/>
+          </a:p>
+        </p:txBody>
+      </p:sp>
+      <p:sp>
+        <p:nvSpPr>
+          <p:cNvPr id="24" name="Text 22"/>
+          <p:cNvSpPr txBox="1"/>
+          <p:nvPr/>
+        </p:nvSpPr>
+        <p:spPr>
+          <a:xfrm>
+            <a:off x="5012960" y="3964509"/>
+            <a:ext cx="1360700" cy="321064"/>
+          </a:xfrm>
+          <a:prstGeom prst="rect">
+            <a:avLst/>
+          </a:prstGeom>
+          <a:noFill/>
+          <a:ln/>
+        </p:spPr>
+        <p:txBody>
+          <a:bodyPr wrap="square" lIns="0" tIns="0" rIns="0" bIns="0" rtlCol="0" anchor="t"/>
+          <a:lstStyle/>
+          <a:p>
+            <a:pPr indent="0" marL="0">
+              <a:lnSpc>
+                <a:spcPct val="105000"/>
+              </a:lnSpc>
+              <a:buNone/>
+            </a:pPr>
+            <a:r>
+              <a:rPr lang="en-US" sz="850" dirty="0">
+                <a:solidFill>
+                  <a:srgbClr val="556B82"/>
+                </a:solidFill>
+                <a:latin typeface="Arial" pitchFamily="34" charset="0"/>
+                <a:ea typeface="Arial" pitchFamily="34" charset="-122"/>
+                <a:cs typeface="Arial" pitchFamily="34" charset="-120"/>
+              </a:rPr>
+              <a:t>SAML signing key,</a:t>
+            </a:r>
+            <a:endParaRPr lang="en-US" sz="850" dirty="0"/>
+          </a:p>
+          <a:p>
+            <a:pPr indent="0" marL="0">
+              <a:lnSpc>
+                <a:spcPct val="105000"/>
+              </a:lnSpc>
+              <a:buNone/>
+            </a:pPr>
+            <a:r>
+              <a:rPr lang="en-US" sz="850" dirty="0">
+                <a:solidFill>
+                  <a:srgbClr val="556B82"/>
+                </a:solidFill>
+                <a:latin typeface="Arial" pitchFamily="34" charset="0"/>
+                <a:ea typeface="Arial" pitchFamily="34" charset="-122"/>
+                <a:cs typeface="Arial" pitchFamily="34" charset="-120"/>
+              </a:rPr>
+              <a:t>client secrets</a:t>
+            </a:r>
+            <a:endParaRPr lang="en-US" sz="850" dirty="0"/>
+          </a:p>
+        </p:txBody>
+      </p:sp>
+      <p:sp>
+        <p:nvSpPr>
+          <p:cNvPr id="25" name="Shape 23"/>
+          <p:cNvSpPr/>
+          <p:nvPr/>
+        </p:nvSpPr>
+        <p:spPr>
+          <a:xfrm>
+            <a:off x="7619695" y="1258397"/>
+            <a:ext cx="3745748" cy="3325307"/>
+          </a:xfrm>
+          <a:prstGeom prst="roundRect">
+            <a:avLst>
+              <a:gd name="adj" fmla="val 2750"/>
+            </a:avLst>
+          </a:prstGeom>
+          <a:solidFill>
+            <a:srgbClr val="FFFFFF"/>
+          </a:solidFill>
+          <a:ln w="9525">
+            <a:solidFill>
+              <a:srgbClr val="475E75"/>
+            </a:solidFill>
+            <a:prstDash val="dash"/>
+          </a:ln>
+        </p:spPr>
+      </p:sp>
+      <p:sp>
+        <p:nvSpPr>
+          <p:cNvPr id="26" name="Text 24"/>
+          <p:cNvSpPr txBox="1"/>
+          <p:nvPr/>
+        </p:nvSpPr>
+        <p:spPr>
+          <a:xfrm>
+            <a:off x="7742005" y="1334841"/>
+            <a:ext cx="3546994" cy="198754"/>
+          </a:xfrm>
+          <a:prstGeom prst="rect">
+            <a:avLst/>
+          </a:prstGeom>
+          <a:noFill/>
+          <a:ln/>
+        </p:spPr>
+        <p:txBody>
+          <a:bodyPr wrap="square" lIns="0" tIns="0" rIns="0" bIns="0" rtlCol="0" anchor="ctr"/>
+          <a:lstStyle/>
+          <a:p>
+            <a:pPr indent="0" marL="0">
+              <a:buNone/>
+            </a:pPr>
+            <a:r>
+              <a:rPr lang="en-US" sz="900" b="1" dirty="0">
+                <a:solidFill>
+                  <a:srgbClr val="475E75"/>
+                </a:solidFill>
+                <a:latin typeface="Arial" pitchFamily="34" charset="0"/>
+                <a:ea typeface="Arial" pitchFamily="34" charset="-122"/>
+                <a:cs typeface="Arial" pitchFamily="34" charset="-120"/>
+              </a:rPr>
+              <a:t>SAP landscape</a:t>
+            </a:r>
+            <a:endParaRPr lang="en-US" sz="900" dirty="0"/>
+          </a:p>
+        </p:txBody>
+      </p:sp>
+      <p:sp>
+        <p:nvSpPr>
+          <p:cNvPr id="27" name="Shape 25"/>
+          <p:cNvSpPr/>
+          <p:nvPr/>
+        </p:nvSpPr>
+        <p:spPr>
+          <a:xfrm>
+            <a:off x="7849027" y="1602395"/>
+            <a:ext cx="3287085" cy="1261323"/>
+          </a:xfrm>
+          <a:prstGeom prst="roundRect">
+            <a:avLst>
+              <a:gd name="adj" fmla="val 4350"/>
+            </a:avLst>
+          </a:prstGeom>
+          <a:solidFill>
+            <a:srgbClr val="FFFFFF"/>
+          </a:solidFill>
+          <a:ln w="9525">
+            <a:solidFill>
+              <a:srgbClr val="475E75"/>
+            </a:solidFill>
+            <a:prstDash val="solid"/>
+          </a:ln>
+        </p:spPr>
+      </p:sp>
+      <p:sp>
+        <p:nvSpPr>
+          <p:cNvPr id="28" name="Text 26"/>
+          <p:cNvSpPr txBox="1"/>
+          <p:nvPr/>
+        </p:nvSpPr>
+        <p:spPr>
+          <a:xfrm>
+            <a:off x="8200668" y="1678838"/>
+            <a:ext cx="2874288" cy="214043"/>
+          </a:xfrm>
+          <a:prstGeom prst="rect">
+            <a:avLst/>
+          </a:prstGeom>
+          <a:noFill/>
+          <a:ln/>
+        </p:spPr>
+        <p:txBody>
+          <a:bodyPr wrap="square" lIns="0" tIns="0" rIns="0" bIns="0" rtlCol="0" anchor="ctr"/>
+          <a:lstStyle/>
+          <a:p>
+            <a:pPr indent="0" marL="0">
+              <a:buNone/>
+            </a:pPr>
+            <a:r>
+              <a:rPr lang="en-US" sz="1000" b="1" dirty="0">
+                <a:solidFill>
+                  <a:srgbClr val="1D2D3E"/>
+                </a:solidFill>
+                <a:latin typeface="Arial" pitchFamily="34" charset="0"/>
+                <a:ea typeface="Arial" pitchFamily="34" charset="-122"/>
+                <a:cs typeface="Arial" pitchFamily="34" charset="-120"/>
+              </a:rPr>
+              <a:t>SAP S/4HANA</a:t>
+            </a:r>
+            <a:endParaRPr lang="en-US" sz="1000" dirty="0"/>
+          </a:p>
+        </p:txBody>
+      </p:sp>
+      <p:sp>
+        <p:nvSpPr>
+          <p:cNvPr id="29" name="Text 27"/>
+          <p:cNvSpPr txBox="1"/>
+          <p:nvPr/>
+        </p:nvSpPr>
+        <p:spPr>
+          <a:xfrm>
+            <a:off x="7956048" y="1938747"/>
+            <a:ext cx="3118909" cy="596262"/>
+          </a:xfrm>
+          <a:prstGeom prst="rect">
+            <a:avLst/>
+          </a:prstGeom>
+          <a:noFill/>
+          <a:ln/>
+        </p:spPr>
+        <p:txBody>
+          <a:bodyPr wrap="square" lIns="0" tIns="0" rIns="0" bIns="0" rtlCol="0" anchor="t"/>
+          <a:lstStyle/>
+          <a:p>
+            <a:pPr indent="0" marL="0">
+              <a:lnSpc>
+                <a:spcPct val="105000"/>
+              </a:lnSpc>
+              <a:buNone/>
+            </a:pPr>
+            <a:r>
+              <a:rPr lang="en-US" sz="850" dirty="0">
+                <a:solidFill>
+                  <a:srgbClr val="556B82"/>
+                </a:solidFill>
+                <a:latin typeface="Arial" pitchFamily="34" charset="0"/>
+                <a:ea typeface="Arial" pitchFamily="34" charset="-122"/>
+                <a:cs typeface="Arial" pitchFamily="34" charset="-120"/>
+              </a:rPr>
+              <a:t>OAuth 2.0 server (SOAUTH2)</a:t>
+            </a:r>
+            <a:endParaRPr lang="en-US" sz="850" dirty="0"/>
+          </a:p>
+          <a:p>
+            <a:pPr indent="0" marL="0">
+              <a:lnSpc>
+                <a:spcPct val="105000"/>
+              </a:lnSpc>
+              <a:buNone/>
+            </a:pPr>
+            <a:r>
+              <a:rPr lang="en-US" sz="850" dirty="0">
+                <a:solidFill>
+                  <a:srgbClr val="556B82"/>
+                </a:solidFill>
+                <a:latin typeface="Arial" pitchFamily="34" charset="0"/>
+                <a:ea typeface="Arial" pitchFamily="34" charset="-122"/>
+                <a:cs typeface="Arial" pitchFamily="34" charset="-120"/>
+              </a:rPr>
+              <a:t>SAML2 trusted provider: the proxy</a:t>
+            </a:r>
+            <a:endParaRPr lang="en-US" sz="850" dirty="0"/>
+          </a:p>
+          <a:p>
+            <a:pPr indent="0" marL="0">
+              <a:lnSpc>
+                <a:spcPct val="105000"/>
+              </a:lnSpc>
+              <a:buNone/>
+            </a:pPr>
+            <a:r>
+              <a:rPr lang="en-US" sz="850" dirty="0">
+                <a:solidFill>
+                  <a:srgbClr val="556B82"/>
+                </a:solidFill>
+                <a:latin typeface="Arial" pitchFamily="34" charset="0"/>
+                <a:ea typeface="Arial" pitchFamily="34" charset="-122"/>
+                <a:cs typeface="Arial" pitchFamily="34" charset="-120"/>
+              </a:rPr>
+              <a:t>User mapping by e-mail or user ID</a:t>
+            </a:r>
+            <a:endParaRPr lang="en-US" sz="850" dirty="0"/>
+          </a:p>
+          <a:p>
+            <a:pPr indent="0" marL="0">
+              <a:lnSpc>
+                <a:spcPct val="105000"/>
+              </a:lnSpc>
+              <a:buNone/>
+            </a:pPr>
+            <a:r>
+              <a:rPr lang="en-US" sz="850" dirty="0">
+                <a:solidFill>
+                  <a:srgbClr val="556B82"/>
+                </a:solidFill>
+                <a:latin typeface="Arial" pitchFamily="34" charset="0"/>
+                <a:ea typeface="Arial" pitchFamily="34" charset="-122"/>
+                <a:cs typeface="Arial" pitchFamily="34" charset="-120"/>
+              </a:rPr>
+              <a:t>OData services run as the business user</a:t>
+            </a:r>
+            <a:endParaRPr lang="en-US" sz="850" dirty="0"/>
+          </a:p>
+        </p:txBody>
+      </p:sp>
+      <p:sp>
+        <p:nvSpPr>
+          <p:cNvPr id="30" name="Shape 28"/>
+          <p:cNvSpPr/>
+          <p:nvPr/>
+        </p:nvSpPr>
+        <p:spPr>
+          <a:xfrm>
+            <a:off x="7849027" y="3284159"/>
+            <a:ext cx="3287085" cy="993770"/>
+          </a:xfrm>
+          <a:prstGeom prst="roundRect">
+            <a:avLst>
+              <a:gd name="adj" fmla="val 5521"/>
+            </a:avLst>
+          </a:prstGeom>
+          <a:solidFill>
+            <a:srgbClr val="FFFFFF"/>
+          </a:solidFill>
+          <a:ln w="9525">
+            <a:solidFill>
+              <a:srgbClr val="475E75"/>
+            </a:solidFill>
+            <a:prstDash val="solid"/>
+          </a:ln>
+        </p:spPr>
+      </p:sp>
+      <p:sp>
+        <p:nvSpPr>
+          <p:cNvPr id="31" name="Text 29"/>
+          <p:cNvSpPr txBox="1"/>
+          <p:nvPr/>
+        </p:nvSpPr>
+        <p:spPr>
+          <a:xfrm>
+            <a:off x="8200668" y="3360603"/>
+            <a:ext cx="2874288" cy="214043"/>
+          </a:xfrm>
+          <a:prstGeom prst="rect">
+            <a:avLst/>
+          </a:prstGeom>
+          <a:noFill/>
+          <a:ln/>
+        </p:spPr>
+        <p:txBody>
+          <a:bodyPr wrap="square" lIns="0" tIns="0" rIns="0" bIns="0" rtlCol="0" anchor="ctr"/>
+          <a:lstStyle/>
+          <a:p>
+            <a:pPr indent="0" marL="0">
+              <a:buNone/>
+            </a:pPr>
+            <a:r>
+              <a:rPr lang="en-US" sz="1000" b="1" dirty="0">
+                <a:solidFill>
+                  <a:srgbClr val="1D2D3E"/>
+                </a:solidFill>
+                <a:latin typeface="Arial" pitchFamily="34" charset="0"/>
+                <a:ea typeface="Arial" pitchFamily="34" charset="-122"/>
+                <a:cs typeface="Arial" pitchFamily="34" charset="-120"/>
+              </a:rPr>
+              <a:t>Other SAP ABAP systems</a:t>
+            </a:r>
+            <a:endParaRPr lang="en-US" sz="1000" dirty="0"/>
+          </a:p>
+        </p:txBody>
+      </p:sp>
+      <p:sp>
+        <p:nvSpPr>
+          <p:cNvPr id="32" name="Text 30"/>
+          <p:cNvSpPr txBox="1"/>
+          <p:nvPr/>
+        </p:nvSpPr>
+        <p:spPr>
+          <a:xfrm>
+            <a:off x="7956048" y="3620512"/>
+            <a:ext cx="3118909" cy="321064"/>
+          </a:xfrm>
+          <a:prstGeom prst="rect">
+            <a:avLst/>
+          </a:prstGeom>
+          <a:noFill/>
+          <a:ln/>
+        </p:spPr>
+        <p:txBody>
+          <a:bodyPr wrap="square" lIns="0" tIns="0" rIns="0" bIns="0" rtlCol="0" anchor="t"/>
+          <a:lstStyle/>
+          <a:p>
+            <a:pPr indent="0" marL="0">
+              <a:lnSpc>
+                <a:spcPct val="105000"/>
+              </a:lnSpc>
+              <a:buNone/>
+            </a:pPr>
+            <a:r>
+              <a:rPr lang="en-US" sz="850" dirty="0">
+                <a:solidFill>
+                  <a:srgbClr val="556B82"/>
+                </a:solidFill>
+                <a:latin typeface="Arial" pitchFamily="34" charset="0"/>
+                <a:ea typeface="Arial" pitchFamily="34" charset="-122"/>
+                <a:cs typeface="Arial" pitchFamily="34" charset="-120"/>
+              </a:rPr>
+              <a:t>SAP ECC, BW/4HANA, Gateway hub, …</a:t>
+            </a:r>
+            <a:endParaRPr lang="en-US" sz="850" dirty="0"/>
+          </a:p>
+          <a:p>
+            <a:pPr indent="0" marL="0">
+              <a:lnSpc>
+                <a:spcPct val="105000"/>
+              </a:lnSpc>
+              <a:buNone/>
+            </a:pPr>
+            <a:r>
+              <a:rPr lang="en-US" sz="850" dirty="0">
+                <a:solidFill>
+                  <a:srgbClr val="556B82"/>
+                </a:solidFill>
+                <a:latin typeface="Arial" pitchFamily="34" charset="0"/>
+                <a:ea typeface="Arial" pitchFamily="34" charset="-122"/>
+                <a:cs typeface="Arial" pitchFamily="34" charset="-120"/>
+              </a:rPr>
+              <a:t>Same trust set-up, one destination each</a:t>
+            </a:r>
+            <a:endParaRPr lang="en-US" sz="850" dirty="0"/>
+          </a:p>
+        </p:txBody>
+      </p:sp>
+      <p:sp>
+        <p:nvSpPr>
+          <p:cNvPr id="33" name="Shape 31"/>
+          <p:cNvSpPr/>
+          <p:nvPr/>
+        </p:nvSpPr>
+        <p:spPr>
+          <a:xfrm>
+            <a:off x="7849027" y="4813036"/>
+            <a:ext cx="3516417" cy="840882"/>
+          </a:xfrm>
+          <a:prstGeom prst="roundRect">
+            <a:avLst>
+              <a:gd name="adj" fmla="val 6525"/>
+            </a:avLst>
+          </a:prstGeom>
+          <a:solidFill>
+            <a:srgbClr val="FFFFFF"/>
+          </a:solidFill>
+          <a:ln w="9525">
+            <a:solidFill>
+              <a:srgbClr val="475E75"/>
+            </a:solidFill>
+            <a:prstDash val="solid"/>
+          </a:ln>
+        </p:spPr>
+      </p:sp>
+      <p:sp>
+        <p:nvSpPr>
+          <p:cNvPr id="34" name="Text 32"/>
+          <p:cNvSpPr txBox="1"/>
+          <p:nvPr/>
+        </p:nvSpPr>
+        <p:spPr>
+          <a:xfrm>
+            <a:off x="8200668" y="4889480"/>
+            <a:ext cx="3103620" cy="214043"/>
+          </a:xfrm>
+          <a:prstGeom prst="rect">
+            <a:avLst/>
+          </a:prstGeom>
+          <a:noFill/>
+          <a:ln/>
+        </p:spPr>
+        <p:txBody>
+          <a:bodyPr wrap="square" lIns="0" tIns="0" rIns="0" bIns="0" rtlCol="0" anchor="ctr"/>
+          <a:lstStyle/>
+          <a:p>
+            <a:pPr indent="0" marL="0">
+              <a:buNone/>
+            </a:pPr>
+            <a:r>
+              <a:rPr lang="en-US" sz="1000" b="1" dirty="0">
+                <a:solidFill>
+                  <a:srgbClr val="1D2D3E"/>
+                </a:solidFill>
+                <a:latin typeface="Arial" pitchFamily="34" charset="0"/>
+                <a:ea typeface="Arial" pitchFamily="34" charset="-122"/>
+                <a:cs typeface="Arial" pitchFamily="34" charset="-120"/>
+              </a:rPr>
+              <a:t>Per-destination configuration</a:t>
+            </a:r>
+            <a:endParaRPr lang="en-US" sz="1000" dirty="0"/>
+          </a:p>
+        </p:txBody>
+      </p:sp>
+      <p:sp>
+        <p:nvSpPr>
+          <p:cNvPr id="35" name="Text 33"/>
+          <p:cNvSpPr txBox="1"/>
+          <p:nvPr/>
+        </p:nvSpPr>
+        <p:spPr>
+          <a:xfrm>
+            <a:off x="7956048" y="5149389"/>
+            <a:ext cx="3348240" cy="321064"/>
+          </a:xfrm>
+          <a:prstGeom prst="rect">
+            <a:avLst/>
+          </a:prstGeom>
+          <a:noFill/>
+          <a:ln/>
+        </p:spPr>
+        <p:txBody>
+          <a:bodyPr wrap="square" lIns="0" tIns="0" rIns="0" bIns="0" rtlCol="0" anchor="t"/>
+          <a:lstStyle/>
+          <a:p>
+            <a:pPr indent="0" marL="0">
+              <a:lnSpc>
+                <a:spcPct val="105000"/>
+              </a:lnSpc>
+              <a:buNone/>
+            </a:pPr>
+            <a:r>
+              <a:rPr lang="en-US" sz="850" dirty="0">
+                <a:solidFill>
+                  <a:srgbClr val="556B82"/>
+                </a:solidFill>
+                <a:latin typeface="Arial" pitchFamily="34" charset="0"/>
+                <a:ea typeface="Arial" pitchFamily="34" charset="-122"/>
+                <a:cs typeface="Arial" pitchFamily="34" charset="-120"/>
+              </a:rPr>
+              <a:t>{PREFIX}_AUTH_TYPE = saml-bearer  (per user)</a:t>
+            </a:r>
+            <a:endParaRPr lang="en-US" sz="850" dirty="0"/>
+          </a:p>
+          <a:p>
+            <a:pPr indent="0" marL="0">
+              <a:lnSpc>
+                <a:spcPct val="105000"/>
+              </a:lnSpc>
+              <a:buNone/>
+            </a:pPr>
+            <a:r>
+              <a:rPr lang="en-US" sz="850" dirty="0">
+                <a:solidFill>
+                  <a:srgbClr val="556B82"/>
+                </a:solidFill>
+                <a:latin typeface="Arial" pitchFamily="34" charset="0"/>
+                <a:ea typeface="Arial" pitchFamily="34" charset="-122"/>
+                <a:cs typeface="Arial" pitchFamily="34" charset="-120"/>
+              </a:rPr>
+              <a:t>or client-credentials (technical user)</a:t>
+            </a:r>
+            <a:endParaRPr lang="en-US" sz="850" dirty="0"/>
+          </a:p>
+        </p:txBody>
+      </p:sp>
+      <p:sp>
+        <p:nvSpPr>
+          <p:cNvPr id="36" name="Shape 34"/>
+          <p:cNvSpPr/>
+          <p:nvPr/>
+        </p:nvSpPr>
+        <p:spPr>
+          <a:xfrm>
+            <a:off x="2306848" y="2022836"/>
+            <a:ext cx="687995" cy="0"/>
+          </a:xfrm>
+          <a:prstGeom prst="line">
+            <a:avLst/>
+          </a:prstGeom>
+          <a:noFill/>
+          <a:ln w="15875">
+            <a:solidFill>
+              <a:srgbClr val="475E75"/>
+            </a:solidFill>
+            <a:prstDash val="solid"/>
+            <a:tailEnd type="triangle"/>
+          </a:ln>
+        </p:spPr>
+      </p:sp>
+      <p:sp>
+        <p:nvSpPr>
+          <p:cNvPr id="37" name="Shape 35"/>
+          <p:cNvSpPr/>
+          <p:nvPr/>
+        </p:nvSpPr>
+        <p:spPr>
+          <a:xfrm>
+            <a:off x="4523720" y="2022836"/>
+            <a:ext cx="382219" cy="0"/>
+          </a:xfrm>
+          <a:prstGeom prst="line">
+            <a:avLst/>
+          </a:prstGeom>
+          <a:noFill/>
+          <a:ln w="15875">
+            <a:solidFill>
+              <a:srgbClr val="475E75"/>
+            </a:solidFill>
+            <a:prstDash val="solid"/>
+            <a:tailEnd type="triangle"/>
+          </a:ln>
+        </p:spPr>
+      </p:sp>
+      <p:sp>
+        <p:nvSpPr>
+          <p:cNvPr id="38" name="Text 36"/>
+          <p:cNvSpPr/>
+          <p:nvPr/>
+        </p:nvSpPr>
+        <p:spPr>
+          <a:xfrm>
+            <a:off x="2570580" y="1942570"/>
+            <a:ext cx="160532" cy="160532"/>
+          </a:xfrm>
+          <a:prstGeom prst="ellipse">
+            <a:avLst/>
+          </a:prstGeom>
+          <a:solidFill>
+            <a:srgbClr val="1D2D3E"/>
+          </a:solidFill>
+          <a:ln w="6350">
+            <a:solidFill>
+              <a:srgbClr val="1D2D3E"/>
+            </a:solidFill>
+          </a:ln>
+        </p:spPr>
+        <p:txBody>
+          <a:bodyPr wrap="square" lIns="0" tIns="0" rIns="0" bIns="0" rtlCol="0" anchor="ctr"/>
+          <a:lstStyle/>
+          <a:p>
+            <a:pPr algn="ctr" indent="0" marL="0">
+              <a:buNone/>
+            </a:pPr>
+            <a:r>
+              <a:rPr lang="en-US" sz="800" b="1" dirty="0">
+                <a:solidFill>
+                  <a:srgbClr val="FFFFFF"/>
+                </a:solidFill>
+                <a:latin typeface="Arial" pitchFamily="34" charset="0"/>
+                <a:ea typeface="Arial" pitchFamily="34" charset="-122"/>
+                <a:cs typeface="Arial" pitchFamily="34" charset="-120"/>
+              </a:rPr>
+              <a:t>1</a:t>
+            </a:r>
+            <a:endParaRPr lang="en-US" sz="800" dirty="0"/>
+          </a:p>
+        </p:txBody>
+      </p:sp>
+      <p:sp>
+        <p:nvSpPr>
+          <p:cNvPr id="39" name="Shape 37"/>
+          <p:cNvSpPr/>
+          <p:nvPr/>
+        </p:nvSpPr>
+        <p:spPr>
+          <a:xfrm flipH="1">
+            <a:off x="4714829" y="2978384"/>
+            <a:ext cx="191110" cy="0"/>
+          </a:xfrm>
+          <a:prstGeom prst="line">
+            <a:avLst/>
+          </a:prstGeom>
+          <a:noFill/>
+          <a:ln w="15875">
+            <a:solidFill>
+              <a:srgbClr val="5D36FF"/>
+            </a:solidFill>
+            <a:prstDash val="dash"/>
+          </a:ln>
+        </p:spPr>
+      </p:sp>
+      <p:sp>
+        <p:nvSpPr>
+          <p:cNvPr id="40" name="Shape 38"/>
+          <p:cNvSpPr/>
+          <p:nvPr/>
+        </p:nvSpPr>
+        <p:spPr>
+          <a:xfrm>
+            <a:off x="4714829" y="2978384"/>
+            <a:ext cx="0" cy="2178649"/>
+          </a:xfrm>
+          <a:prstGeom prst="line">
+            <a:avLst/>
+          </a:prstGeom>
+          <a:noFill/>
+          <a:ln w="15875">
+            <a:solidFill>
+              <a:srgbClr val="5D36FF"/>
+            </a:solidFill>
+            <a:prstDash val="dash"/>
+          </a:ln>
+        </p:spPr>
+      </p:sp>
+      <p:sp>
+        <p:nvSpPr>
+          <p:cNvPr id="41" name="Shape 39"/>
+          <p:cNvSpPr/>
+          <p:nvPr/>
+        </p:nvSpPr>
+        <p:spPr>
+          <a:xfrm flipH="1">
+            <a:off x="2306848" y="5157033"/>
+            <a:ext cx="2407981" cy="0"/>
+          </a:xfrm>
+          <a:prstGeom prst="line">
+            <a:avLst/>
+          </a:prstGeom>
+          <a:noFill/>
+          <a:ln w="15875">
+            <a:solidFill>
+              <a:srgbClr val="5D36FF"/>
+            </a:solidFill>
+            <a:prstDash val="dash"/>
+            <a:tailEnd type="triangle"/>
+          </a:ln>
+        </p:spPr>
+      </p:sp>
+      <p:sp>
+        <p:nvSpPr>
+          <p:cNvPr id="42" name="Text 40"/>
+          <p:cNvSpPr/>
+          <p:nvPr/>
+        </p:nvSpPr>
+        <p:spPr>
+          <a:xfrm>
+            <a:off x="4634563" y="3968331"/>
+            <a:ext cx="160532" cy="160532"/>
+          </a:xfrm>
+          <a:prstGeom prst="ellipse">
+            <a:avLst/>
+          </a:prstGeom>
+          <a:solidFill>
+            <a:srgbClr val="1D2D3E"/>
+          </a:solidFill>
+          <a:ln w="6350">
+            <a:solidFill>
+              <a:srgbClr val="1D2D3E"/>
+            </a:solidFill>
+          </a:ln>
+        </p:spPr>
+        <p:txBody>
+          <a:bodyPr wrap="square" lIns="0" tIns="0" rIns="0" bIns="0" rtlCol="0" anchor="ctr"/>
+          <a:lstStyle/>
+          <a:p>
+            <a:pPr algn="ctr" indent="0" marL="0">
+              <a:buNone/>
+            </a:pPr>
+            <a:r>
+              <a:rPr lang="en-US" sz="800" b="1" dirty="0">
+                <a:solidFill>
+                  <a:srgbClr val="FFFFFF"/>
+                </a:solidFill>
+                <a:latin typeface="Arial" pitchFamily="34" charset="0"/>
+                <a:ea typeface="Arial" pitchFamily="34" charset="-122"/>
+                <a:cs typeface="Arial" pitchFamily="34" charset="-120"/>
+              </a:rPr>
+              <a:t>2</a:t>
+            </a:r>
+            <a:endParaRPr lang="en-US" sz="800" dirty="0"/>
+          </a:p>
+        </p:txBody>
+      </p:sp>
+      <p:sp>
+        <p:nvSpPr>
+          <p:cNvPr id="43" name="Text 41"/>
+          <p:cNvSpPr txBox="1"/>
+          <p:nvPr/>
+        </p:nvSpPr>
+        <p:spPr>
+          <a:xfrm>
+            <a:off x="2612624" y="4965924"/>
+            <a:ext cx="1834652" cy="114666"/>
+          </a:xfrm>
+          <a:prstGeom prst="rect">
+            <a:avLst/>
+          </a:prstGeom>
+          <a:noFill/>
+          <a:ln/>
+        </p:spPr>
+        <p:txBody>
+          <a:bodyPr wrap="square" lIns="0" tIns="0" rIns="0" bIns="0" rtlCol="0" anchor="ctr"/>
+          <a:lstStyle/>
+          <a:p>
+            <a:pPr algn="ctr" indent="0" marL="0">
+              <a:buNone/>
+            </a:pPr>
+            <a:r>
+              <a:rPr lang="en-US" sz="750" dirty="0">
+                <a:solidFill>
+                  <a:srgbClr val="556B82"/>
+                </a:solidFill>
+                <a:latin typeface="Arial" pitchFamily="34" charset="0"/>
+                <a:ea typeface="Arial" pitchFamily="34" charset="-122"/>
+                <a:cs typeface="Arial" pitchFamily="34" charset="-120"/>
+              </a:rPr>
+              <a:t>OIDC login (proxied) · JWKS</a:t>
+            </a:r>
+            <a:endParaRPr lang="en-US" sz="750" dirty="0"/>
+          </a:p>
+        </p:txBody>
+      </p:sp>
+      <p:sp>
+        <p:nvSpPr>
+          <p:cNvPr id="44" name="Shape 42"/>
+          <p:cNvSpPr/>
+          <p:nvPr/>
+        </p:nvSpPr>
+        <p:spPr>
+          <a:xfrm>
+            <a:off x="5670377" y="3207715"/>
+            <a:ext cx="0" cy="420441"/>
+          </a:xfrm>
+          <a:prstGeom prst="line">
+            <a:avLst/>
+          </a:prstGeom>
+          <a:noFill/>
+          <a:ln w="15875">
+            <a:solidFill>
+              <a:srgbClr val="5D36FF"/>
+            </a:solidFill>
+            <a:prstDash val="dash"/>
+            <a:headEnd type="triangle"/>
+            <a:tailEnd type="triangle"/>
+          </a:ln>
+        </p:spPr>
+      </p:sp>
+      <p:sp>
+        <p:nvSpPr>
+          <p:cNvPr id="45" name="Shape 43"/>
+          <p:cNvSpPr/>
+          <p:nvPr/>
+        </p:nvSpPr>
+        <p:spPr>
+          <a:xfrm>
+            <a:off x="6893479" y="1984614"/>
+            <a:ext cx="955548" cy="0"/>
+          </a:xfrm>
+          <a:prstGeom prst="line">
+            <a:avLst/>
+          </a:prstGeom>
+          <a:noFill/>
+          <a:ln w="15875">
+            <a:solidFill>
+              <a:srgbClr val="5D36FF"/>
+            </a:solidFill>
+            <a:prstDash val="dash"/>
+            <a:tailEnd type="triangle"/>
+          </a:ln>
+        </p:spPr>
+      </p:sp>
+      <p:sp>
+        <p:nvSpPr>
+          <p:cNvPr id="46" name="Text 44"/>
+          <p:cNvSpPr/>
+          <p:nvPr/>
+        </p:nvSpPr>
+        <p:spPr>
+          <a:xfrm>
+            <a:off x="7287164" y="1904348"/>
+            <a:ext cx="160532" cy="160532"/>
+          </a:xfrm>
+          <a:prstGeom prst="ellipse">
+            <a:avLst/>
+          </a:prstGeom>
+          <a:solidFill>
+            <a:srgbClr val="1D2D3E"/>
+          </a:solidFill>
+          <a:ln w="6350">
+            <a:solidFill>
+              <a:srgbClr val="1D2D3E"/>
+            </a:solidFill>
+          </a:ln>
+        </p:spPr>
+        <p:txBody>
+          <a:bodyPr wrap="square" lIns="0" tIns="0" rIns="0" bIns="0" rtlCol="0" anchor="ctr"/>
+          <a:lstStyle/>
+          <a:p>
+            <a:pPr algn="ctr" indent="0" marL="0">
+              <a:buNone/>
+            </a:pPr>
+            <a:r>
+              <a:rPr lang="en-US" sz="800" b="1" dirty="0">
+                <a:solidFill>
+                  <a:srgbClr val="FFFFFF"/>
+                </a:solidFill>
+                <a:latin typeface="Arial" pitchFamily="34" charset="0"/>
+                <a:ea typeface="Arial" pitchFamily="34" charset="-122"/>
+                <a:cs typeface="Arial" pitchFamily="34" charset="-120"/>
+              </a:rPr>
+              <a:t>3</a:t>
+            </a:r>
+            <a:endParaRPr lang="en-US" sz="800" dirty="0"/>
+          </a:p>
+        </p:txBody>
+      </p:sp>
+      <p:sp>
+        <p:nvSpPr>
+          <p:cNvPr id="47" name="Text 45"/>
+          <p:cNvSpPr txBox="1"/>
+          <p:nvPr/>
+        </p:nvSpPr>
+        <p:spPr>
+          <a:xfrm>
+            <a:off x="6946989" y="1778215"/>
+            <a:ext cx="687995" cy="114666"/>
+          </a:xfrm>
+          <a:prstGeom prst="rect">
+            <a:avLst/>
+          </a:prstGeom>
+          <a:noFill/>
+          <a:ln/>
+        </p:spPr>
+        <p:txBody>
+          <a:bodyPr wrap="square" lIns="0" tIns="0" rIns="0" bIns="0" rtlCol="0" anchor="ctr"/>
+          <a:lstStyle/>
+          <a:p>
+            <a:pPr algn="ctr" indent="0" marL="0">
+              <a:buNone/>
+            </a:pPr>
+            <a:r>
+              <a:rPr lang="en-US" sz="750" dirty="0">
+                <a:solidFill>
+                  <a:srgbClr val="556B82"/>
+                </a:solidFill>
+                <a:latin typeface="Arial" pitchFamily="34" charset="0"/>
+                <a:ea typeface="Arial" pitchFamily="34" charset="-122"/>
+                <a:cs typeface="Arial" pitchFamily="34" charset="-120"/>
+              </a:rPr>
+              <a:t>SAML bearer</a:t>
+            </a:r>
+            <a:endParaRPr lang="en-US" sz="750" dirty="0"/>
+          </a:p>
+        </p:txBody>
+      </p:sp>
+      <p:sp>
+        <p:nvSpPr>
+          <p:cNvPr id="48" name="Shape 46"/>
+          <p:cNvSpPr/>
+          <p:nvPr/>
+        </p:nvSpPr>
+        <p:spPr>
+          <a:xfrm>
+            <a:off x="6893479" y="2596164"/>
+            <a:ext cx="955548" cy="0"/>
+          </a:xfrm>
+          <a:prstGeom prst="line">
+            <a:avLst/>
+          </a:prstGeom>
+          <a:noFill/>
+          <a:ln w="15875">
+            <a:solidFill>
+              <a:srgbClr val="475E75"/>
+            </a:solidFill>
+            <a:prstDash val="solid"/>
+            <a:tailEnd type="triangle"/>
+          </a:ln>
+        </p:spPr>
+      </p:sp>
+      <p:sp>
+        <p:nvSpPr>
+          <p:cNvPr id="49" name="Text 47"/>
+          <p:cNvSpPr/>
+          <p:nvPr/>
+        </p:nvSpPr>
+        <p:spPr>
+          <a:xfrm>
+            <a:off x="7287164" y="2515898"/>
+            <a:ext cx="160532" cy="160532"/>
+          </a:xfrm>
+          <a:prstGeom prst="ellipse">
+            <a:avLst/>
+          </a:prstGeom>
+          <a:solidFill>
+            <a:srgbClr val="1D2D3E"/>
+          </a:solidFill>
+          <a:ln w="6350">
+            <a:solidFill>
+              <a:srgbClr val="1D2D3E"/>
+            </a:solidFill>
+          </a:ln>
+        </p:spPr>
+        <p:txBody>
+          <a:bodyPr wrap="square" lIns="0" tIns="0" rIns="0" bIns="0" rtlCol="0" anchor="ctr"/>
+          <a:lstStyle/>
+          <a:p>
+            <a:pPr algn="ctr" indent="0" marL="0">
+              <a:buNone/>
+            </a:pPr>
+            <a:r>
+              <a:rPr lang="en-US" sz="800" b="1" dirty="0">
+                <a:solidFill>
+                  <a:srgbClr val="FFFFFF"/>
+                </a:solidFill>
+                <a:latin typeface="Arial" pitchFamily="34" charset="0"/>
+                <a:ea typeface="Arial" pitchFamily="34" charset="-122"/>
+                <a:cs typeface="Arial" pitchFamily="34" charset="-120"/>
+              </a:rPr>
+              <a:t>4</a:t>
+            </a:r>
+            <a:endParaRPr lang="en-US" sz="800" dirty="0"/>
+          </a:p>
+        </p:txBody>
+      </p:sp>
+      <p:sp>
+        <p:nvSpPr>
+          <p:cNvPr id="50" name="Text 48"/>
+          <p:cNvSpPr txBox="1"/>
+          <p:nvPr/>
+        </p:nvSpPr>
+        <p:spPr>
+          <a:xfrm>
+            <a:off x="6946989" y="2389766"/>
+            <a:ext cx="687995" cy="114666"/>
+          </a:xfrm>
+          <a:prstGeom prst="rect">
+            <a:avLst/>
+          </a:prstGeom>
+          <a:noFill/>
+          <a:ln/>
+        </p:spPr>
+        <p:txBody>
+          <a:bodyPr wrap="square" lIns="0" tIns="0" rIns="0" bIns="0" rtlCol="0" anchor="ctr"/>
+          <a:lstStyle/>
+          <a:p>
+            <a:pPr algn="ctr" indent="0" marL="0">
+              <a:buNone/>
+            </a:pPr>
+            <a:r>
+              <a:rPr lang="en-US" sz="750" dirty="0">
+                <a:solidFill>
+                  <a:srgbClr val="556B82"/>
+                </a:solidFill>
+                <a:latin typeface="Arial" pitchFamily="34" charset="0"/>
+                <a:ea typeface="Arial" pitchFamily="34" charset="-122"/>
+                <a:cs typeface="Arial" pitchFamily="34" charset="-120"/>
+              </a:rPr>
+              <a:t>OData</a:t>
+            </a:r>
+            <a:endParaRPr lang="en-US" sz="750" dirty="0"/>
+          </a:p>
+        </p:txBody>
+      </p:sp>
+      <p:sp>
+        <p:nvSpPr>
+          <p:cNvPr id="51" name="Shape 49"/>
+          <p:cNvSpPr/>
+          <p:nvPr/>
+        </p:nvSpPr>
+        <p:spPr>
+          <a:xfrm>
+            <a:off x="6893479" y="3054828"/>
+            <a:ext cx="343997" cy="0"/>
+          </a:xfrm>
+          <a:prstGeom prst="line">
+            <a:avLst/>
+          </a:prstGeom>
+          <a:noFill/>
+          <a:ln w="15875">
+            <a:solidFill>
+              <a:srgbClr val="475E75"/>
+            </a:solidFill>
+            <a:prstDash val="solid"/>
+          </a:ln>
+        </p:spPr>
+      </p:sp>
+      <p:sp>
+        <p:nvSpPr>
+          <p:cNvPr id="52" name="Shape 50"/>
+          <p:cNvSpPr/>
+          <p:nvPr/>
+        </p:nvSpPr>
+        <p:spPr>
+          <a:xfrm>
+            <a:off x="7237476" y="3054828"/>
+            <a:ext cx="0" cy="726216"/>
+          </a:xfrm>
+          <a:prstGeom prst="line">
+            <a:avLst/>
+          </a:prstGeom>
+          <a:noFill/>
+          <a:ln w="15875">
+            <a:solidFill>
+              <a:srgbClr val="475E75"/>
+            </a:solidFill>
+            <a:prstDash val="solid"/>
+          </a:ln>
+        </p:spPr>
+      </p:sp>
+      <p:sp>
+        <p:nvSpPr>
+          <p:cNvPr id="53" name="Shape 51"/>
+          <p:cNvSpPr/>
+          <p:nvPr/>
+        </p:nvSpPr>
+        <p:spPr>
+          <a:xfrm>
+            <a:off x="7237476" y="3781044"/>
+            <a:ext cx="611551" cy="0"/>
+          </a:xfrm>
+          <a:prstGeom prst="line">
+            <a:avLst/>
+          </a:prstGeom>
+          <a:noFill/>
+          <a:ln w="15875">
+            <a:solidFill>
+              <a:srgbClr val="475E75"/>
+            </a:solidFill>
+            <a:prstDash val="solid"/>
+            <a:tailEnd type="triangle"/>
+          </a:ln>
+        </p:spPr>
+      </p:sp>
+      <p:sp>
+        <p:nvSpPr>
+          <p:cNvPr id="54" name="Text 52"/>
+          <p:cNvSpPr/>
+          <p:nvPr/>
+        </p:nvSpPr>
+        <p:spPr>
+          <a:xfrm>
+            <a:off x="7157210" y="3341492"/>
+            <a:ext cx="160532" cy="160532"/>
+          </a:xfrm>
+          <a:prstGeom prst="ellipse">
+            <a:avLst/>
+          </a:prstGeom>
+          <a:solidFill>
+            <a:srgbClr val="1D2D3E"/>
+          </a:solidFill>
+          <a:ln w="6350">
+            <a:solidFill>
+              <a:srgbClr val="1D2D3E"/>
+            </a:solidFill>
+          </a:ln>
+        </p:spPr>
+        <p:txBody>
+          <a:bodyPr wrap="square" lIns="0" tIns="0" rIns="0" bIns="0" rtlCol="0" anchor="ctr"/>
+          <a:lstStyle/>
+          <a:p>
+            <a:pPr algn="ctr" indent="0" marL="0">
+              <a:buNone/>
+            </a:pPr>
+            <a:r>
+              <a:rPr lang="en-US" sz="800" b="1" dirty="0">
+                <a:solidFill>
+                  <a:srgbClr val="FFFFFF"/>
+                </a:solidFill>
+                <a:latin typeface="Arial" pitchFamily="34" charset="0"/>
+                <a:ea typeface="Arial" pitchFamily="34" charset="-122"/>
+                <a:cs typeface="Arial" pitchFamily="34" charset="-120"/>
+              </a:rPr>
+              <a:t>5</a:t>
+            </a:r>
+            <a:endParaRPr lang="en-US" sz="800" dirty="0"/>
+          </a:p>
+        </p:txBody>
+      </p:sp>
+      <p:sp>
+        <p:nvSpPr>
+          <p:cNvPr id="55" name="Shape 53"/>
+          <p:cNvSpPr/>
+          <p:nvPr/>
+        </p:nvSpPr>
+        <p:spPr>
+          <a:xfrm>
+            <a:off x="548640" y="6446520"/>
+            <a:ext cx="292608" cy="155448"/>
+          </a:xfrm>
+          <a:prstGeom prst="roundRect">
+            <a:avLst>
+              <a:gd name="adj" fmla="val 23529"/>
+            </a:avLst>
+          </a:prstGeom>
+          <a:solidFill>
+            <a:srgbClr val="F5F6F7"/>
+          </a:solidFill>
+          <a:ln w="12700">
+            <a:solidFill>
+              <a:srgbClr val="475E75"/>
+            </a:solidFill>
+            <a:prstDash val="solid"/>
+          </a:ln>
+        </p:spPr>
+      </p:sp>
+      <p:sp>
+        <p:nvSpPr>
+          <p:cNvPr id="56" name="Text 54"/>
+          <p:cNvSpPr txBox="1"/>
+          <p:nvPr/>
+        </p:nvSpPr>
+        <p:spPr>
+          <a:xfrm>
+            <a:off x="932688" y="6419088"/>
+            <a:ext cx="1828800" cy="210312"/>
+          </a:xfrm>
+          <a:prstGeom prst="rect">
+            <a:avLst/>
+          </a:prstGeom>
+          <a:noFill/>
+          <a:ln/>
+        </p:spPr>
+        <p:txBody>
+          <a:bodyPr wrap="square" lIns="0" tIns="0" rIns="0" bIns="0" rtlCol="0" anchor="ctr"/>
+          <a:lstStyle/>
+          <a:p>
+            <a:pPr indent="0" marL="0">
+              <a:buNone/>
+            </a:pPr>
+            <a:r>
+              <a:rPr lang="en-US" sz="900" dirty="0">
+                <a:solidFill>
+                  <a:srgbClr val="1D2D3E"/>
+                </a:solidFill>
+                <a:latin typeface="Arial" pitchFamily="34" charset="0"/>
+                <a:ea typeface="Arial" pitchFamily="34" charset="-122"/>
+                <a:cs typeface="Arial" pitchFamily="34" charset="-120"/>
+              </a:rPr>
+              <a:t>Non-SAP / customer</a:t>
+            </a:r>
+            <a:endParaRPr lang="en-US" sz="900" dirty="0"/>
+          </a:p>
+        </p:txBody>
+      </p:sp>
+      <p:sp>
+        <p:nvSpPr>
+          <p:cNvPr id="57" name="Shape 55"/>
+          <p:cNvSpPr/>
+          <p:nvPr/>
+        </p:nvSpPr>
+        <p:spPr>
+          <a:xfrm>
+            <a:off x="2273198" y="6524244"/>
+            <a:ext cx="292608" cy="0"/>
+          </a:xfrm>
+          <a:prstGeom prst="line">
+            <a:avLst/>
+          </a:prstGeom>
+          <a:noFill/>
+          <a:ln w="15875">
+            <a:solidFill>
+              <a:srgbClr val="475E75"/>
+            </a:solidFill>
+            <a:prstDash val="solid"/>
+            <a:tailEnd type="triangle"/>
+          </a:ln>
+        </p:spPr>
+      </p:sp>
+      <p:sp>
+        <p:nvSpPr>
+          <p:cNvPr id="58" name="Text 56"/>
+          <p:cNvSpPr txBox="1"/>
+          <p:nvPr/>
+        </p:nvSpPr>
+        <p:spPr>
+          <a:xfrm>
+            <a:off x="2657246" y="6419088"/>
+            <a:ext cx="1828800" cy="210312"/>
+          </a:xfrm>
+          <a:prstGeom prst="rect">
+            <a:avLst/>
+          </a:prstGeom>
+          <a:noFill/>
+          <a:ln/>
+        </p:spPr>
+        <p:txBody>
+          <a:bodyPr wrap="square" lIns="0" tIns="0" rIns="0" bIns="0" rtlCol="0" anchor="ctr"/>
+          <a:lstStyle/>
+          <a:p>
+            <a:pPr indent="0" marL="0">
+              <a:buNone/>
+            </a:pPr>
+            <a:r>
+              <a:rPr lang="en-US" sz="900" dirty="0">
+                <a:solidFill>
+                  <a:srgbClr val="1D2D3E"/>
+                </a:solidFill>
+                <a:latin typeface="Arial" pitchFamily="34" charset="0"/>
+                <a:ea typeface="Arial" pitchFamily="34" charset="-122"/>
+                <a:cs typeface="Arial" pitchFamily="34" charset="-120"/>
+              </a:rPr>
+              <a:t>API call / data flow</a:t>
+            </a:r>
+            <a:endParaRPr lang="en-US" sz="900" dirty="0"/>
+          </a:p>
+        </p:txBody>
+      </p:sp>
+      <p:sp>
+        <p:nvSpPr>
+          <p:cNvPr id="59" name="Shape 57"/>
+          <p:cNvSpPr/>
+          <p:nvPr/>
+        </p:nvSpPr>
+        <p:spPr>
+          <a:xfrm>
+            <a:off x="4111142" y="6524244"/>
+            <a:ext cx="292608" cy="0"/>
+          </a:xfrm>
+          <a:prstGeom prst="line">
+            <a:avLst/>
+          </a:prstGeom>
+          <a:noFill/>
+          <a:ln w="15875">
+            <a:solidFill>
+              <a:srgbClr val="5D36FF"/>
+            </a:solidFill>
+            <a:prstDash val="dash"/>
+            <a:tailEnd type="triangle"/>
+          </a:ln>
+        </p:spPr>
+      </p:sp>
+      <p:sp>
+        <p:nvSpPr>
+          <p:cNvPr id="60" name="Text 58"/>
+          <p:cNvSpPr txBox="1"/>
+          <p:nvPr/>
+        </p:nvSpPr>
+        <p:spPr>
+          <a:xfrm>
+            <a:off x="4495190" y="6419088"/>
+            <a:ext cx="1828800" cy="210312"/>
+          </a:xfrm>
+          <a:prstGeom prst="rect">
+            <a:avLst/>
+          </a:prstGeom>
+          <a:noFill/>
+          <a:ln/>
+        </p:spPr>
+        <p:txBody>
+          <a:bodyPr wrap="square" lIns="0" tIns="0" rIns="0" bIns="0" rtlCol="0" anchor="ctr"/>
+          <a:lstStyle/>
+          <a:p>
+            <a:pPr indent="0" marL="0">
+              <a:buNone/>
+            </a:pPr>
+            <a:r>
+              <a:rPr lang="en-US" sz="900" dirty="0">
+                <a:solidFill>
+                  <a:srgbClr val="1D2D3E"/>
+                </a:solidFill>
+                <a:latin typeface="Arial" pitchFamily="34" charset="0"/>
+                <a:ea typeface="Arial" pitchFamily="34" charset="-122"/>
+                <a:cs typeface="Arial" pitchFamily="34" charset="-120"/>
+              </a:rPr>
+              <a:t>Authentication / token flow</a:t>
+            </a:r>
+            <a:endParaRPr lang="en-US" sz="900" dirty="0"/>
+          </a:p>
+        </p:txBody>
+      </p:sp>
+      <p:sp>
+        <p:nvSpPr>
+          <p:cNvPr id="61" name="Text 59"/>
+          <p:cNvSpPr/>
+          <p:nvPr/>
+        </p:nvSpPr>
+        <p:spPr>
+          <a:xfrm>
+            <a:off x="6409944" y="6432804"/>
+            <a:ext cx="182880" cy="182880"/>
+          </a:xfrm>
+          <a:prstGeom prst="ellipse">
+            <a:avLst/>
+          </a:prstGeom>
+          <a:solidFill>
+            <a:srgbClr val="1D2D3E"/>
+          </a:solidFill>
+          <a:ln/>
+        </p:spPr>
+        <p:txBody>
+          <a:bodyPr wrap="square" lIns="0" tIns="0" rIns="0" bIns="0" rtlCol="0" anchor="ctr"/>
+          <a:lstStyle/>
+          <a:p>
+            <a:pPr algn="ctr" indent="0" marL="0">
+              <a:buNone/>
+            </a:pPr>
+            <a:r>
+              <a:rPr lang="en-US" sz="750" b="1" dirty="0">
+                <a:solidFill>
+                  <a:srgbClr val="FFFFFF"/>
+                </a:solidFill>
+                <a:latin typeface="Arial" pitchFamily="34" charset="0"/>
+                <a:ea typeface="Arial" pitchFamily="34" charset="-122"/>
+                <a:cs typeface="Arial" pitchFamily="34" charset="-120"/>
+              </a:rPr>
+              <a:t>1</a:t>
+            </a:r>
+            <a:endParaRPr lang="en-US" sz="750" dirty="0"/>
+          </a:p>
+        </p:txBody>
+      </p:sp>
+      <p:sp>
+        <p:nvSpPr>
+          <p:cNvPr id="62" name="Text 60"/>
+          <p:cNvSpPr txBox="1"/>
+          <p:nvPr/>
+        </p:nvSpPr>
+        <p:spPr>
+          <a:xfrm>
+            <a:off x="6729984" y="6419088"/>
+            <a:ext cx="1828800" cy="210312"/>
+          </a:xfrm>
+          <a:prstGeom prst="rect">
+            <a:avLst/>
+          </a:prstGeom>
+          <a:noFill/>
+          <a:ln/>
+        </p:spPr>
+        <p:txBody>
+          <a:bodyPr wrap="square" lIns="0" tIns="0" rIns="0" bIns="0" rtlCol="0" anchor="ctr"/>
+          <a:lstStyle/>
+          <a:p>
+            <a:pPr indent="0" marL="0">
+              <a:buNone/>
+            </a:pPr>
+            <a:r>
+              <a:rPr lang="en-US" sz="900" dirty="0">
+                <a:solidFill>
+                  <a:srgbClr val="1D2D3E"/>
+                </a:solidFill>
+                <a:latin typeface="Arial" pitchFamily="34" charset="0"/>
+                <a:ea typeface="Arial" pitchFamily="34" charset="-122"/>
+                <a:cs typeface="Arial" pitchFamily="34" charset="-120"/>
+              </a:rPr>
+              <a:t>Flow step (see next slide)</a:t>
+            </a:r>
+            <a:endParaRPr lang="en-US" sz="900" dirty="0"/>
+          </a:p>
+        </p:txBody>
+      </p:sp>
+      <p:pic>
+        <p:nvPicPr>
+          <p:cNvPr id="64" name="Image 0" descr="MCP client icon">    </p:cNvPr>
+          <p:cNvPicPr>
+            <a:picLocks noChangeAspect="1"/>
+          </p:cNvPicPr>
+          <p:nvPr/>
+        </p:nvPicPr>
+        <p:blipFill>
+          <a:blip r:embed="rId1"/>
+          <a:stretch>
+            <a:fillRect/>
+          </a:stretch>
+        </p:blipFill>
+        <p:spPr>
+          <a:xfrm>
+            <a:off x="793260" y="1533595"/>
+            <a:ext cx="198754" cy="198754"/>
+          </a:xfrm>
+          <a:prstGeom prst="rect">
+            <a:avLst/>
+          </a:prstGeom>
+        </p:spPr>
+      </p:pic>
+      <p:pic>
+        <p:nvPicPr>
+          <p:cNvPr id="65" name="Image 1" descr="Reverse proxy icon">    </p:cNvPr>
+          <p:cNvPicPr>
+            <a:picLocks noChangeAspect="1"/>
+          </p:cNvPicPr>
+          <p:nvPr/>
+        </p:nvPicPr>
+        <p:blipFill>
+          <a:blip r:embed="rId2"/>
+          <a:stretch>
+            <a:fillRect/>
+          </a:stretch>
+        </p:blipFill>
+        <p:spPr>
+          <a:xfrm>
+            <a:off x="3086575" y="1686483"/>
+            <a:ext cx="198754" cy="198754"/>
+          </a:xfrm>
+          <a:prstGeom prst="rect">
+            <a:avLst/>
+          </a:prstGeom>
+        </p:spPr>
+      </p:pic>
+      <p:pic>
+        <p:nvPicPr>
+          <p:cNvPr id="66" name="Image 2" descr="Any OIDC IdP icon">    </p:cNvPr>
+          <p:cNvPicPr>
+            <a:picLocks noChangeAspect="1"/>
+          </p:cNvPicPr>
+          <p:nvPr/>
+        </p:nvPicPr>
+        <p:blipFill>
+          <a:blip r:embed="rId3"/>
+          <a:stretch>
+            <a:fillRect/>
+          </a:stretch>
+        </p:blipFill>
+        <p:spPr>
+          <a:xfrm>
+            <a:off x="793260" y="4820680"/>
+            <a:ext cx="198754" cy="198754"/>
+          </a:xfrm>
+          <a:prstGeom prst="rect">
+            <a:avLst/>
+          </a:prstGeom>
+        </p:spPr>
+      </p:pic>
+      <p:pic>
+        <p:nvPicPr>
+          <p:cNvPr id="67" name="Image 3" descr="SAP S/4HANA icon">    </p:cNvPr>
+          <p:cNvPicPr>
+            <a:picLocks noChangeAspect="1"/>
+          </p:cNvPicPr>
+          <p:nvPr/>
+        </p:nvPicPr>
+        <p:blipFill>
+          <a:blip r:embed="rId4"/>
+          <a:stretch>
+            <a:fillRect/>
+          </a:stretch>
+        </p:blipFill>
+        <p:spPr>
+          <a:xfrm>
+            <a:off x="7940759" y="1686483"/>
+            <a:ext cx="198754" cy="198754"/>
+          </a:xfrm>
+          <a:prstGeom prst="rect">
+            <a:avLst/>
+          </a:prstGeom>
+        </p:spPr>
+      </p:pic>
+      <p:pic>
+        <p:nvPicPr>
+          <p:cNvPr id="68" name="Image 4" descr="odata-mcp-proxy icon">    </p:cNvPr>
+          <p:cNvPicPr>
+            <a:picLocks noChangeAspect="1"/>
+          </p:cNvPicPr>
+          <p:nvPr/>
+        </p:nvPicPr>
+        <p:blipFill>
+          <a:blip r:embed="rId5"/>
+          <a:stretch>
+            <a:fillRect/>
+          </a:stretch>
+        </p:blipFill>
+        <p:spPr>
+          <a:xfrm>
+            <a:off x="4997671" y="1571817"/>
+            <a:ext cx="198754" cy="198754"/>
+          </a:xfrm>
+          <a:prstGeom prst="rect">
+            <a:avLst/>
+          </a:prstGeom>
+        </p:spPr>
+      </p:pic>
+      <p:pic>
+        <p:nvPicPr>
+          <p:cNvPr id="69" name="Image 5" descr="Secret store icon">    </p:cNvPr>
+          <p:cNvPicPr>
+            <a:picLocks noChangeAspect="1"/>
+          </p:cNvPicPr>
+          <p:nvPr/>
+        </p:nvPicPr>
+        <p:blipFill>
+          <a:blip r:embed="rId6"/>
+          <a:stretch>
+            <a:fillRect/>
+          </a:stretch>
+        </p:blipFill>
+        <p:spPr>
+          <a:xfrm>
+            <a:off x="4997671" y="3712245"/>
+            <a:ext cx="198754" cy="198754"/>
+          </a:xfrm>
+          <a:prstGeom prst="rect">
+            <a:avLst/>
+          </a:prstGeom>
+        </p:spPr>
+      </p:pic>
+      <p:pic>
+        <p:nvPicPr>
+          <p:cNvPr id="70" name="Image 6" descr="Other SAP ABAP systems icon">    </p:cNvPr>
+          <p:cNvPicPr>
+            <a:picLocks noChangeAspect="1"/>
+          </p:cNvPicPr>
+          <p:nvPr/>
+        </p:nvPicPr>
+        <p:blipFill>
+          <a:blip r:embed="rId7"/>
+          <a:stretch>
+            <a:fillRect/>
+          </a:stretch>
+        </p:blipFill>
+        <p:spPr>
+          <a:xfrm>
+            <a:off x="7940759" y="3368247"/>
+            <a:ext cx="198754" cy="198754"/>
+          </a:xfrm>
+          <a:prstGeom prst="rect">
+            <a:avLst/>
+          </a:prstGeom>
+        </p:spPr>
+      </p:pic>
+      <p:pic>
+        <p:nvPicPr>
+          <p:cNvPr id="71" name="Image 7" descr="Per-destination configuration icon">    </p:cNvPr>
+          <p:cNvPicPr>
+            <a:picLocks noChangeAspect="1"/>
+          </p:cNvPicPr>
+          <p:nvPr/>
+        </p:nvPicPr>
+        <p:blipFill>
+          <a:blip r:embed="rId8"/>
+          <a:stretch>
+            <a:fillRect/>
+          </a:stretch>
+        </p:blipFill>
+        <p:spPr>
+          <a:xfrm>
+            <a:off x="7940759" y="4897124"/>
+            <a:ext cx="198754" cy="198754"/>
+          </a:xfrm>
+          <a:prstGeom prst="rect">
+            <a:avLst/>
+          </a:prstGeom>
+        </p:spPr>
+      </p:pic>
+    </p:spTree>
+  </p:cSld>
+  <p:clrMapOvr>
+    <a:masterClrMapping/>
+  </p:clrMapOvr>
+</p:sld>
+</file>
+
+<file path=ppt/slides/slide6.xml><?xml version="1.0" encoding="utf-8"?>
+<p:sld xmlns:a="http://schemas.openxmlformats.org/drawingml/2006/main" xmlns:r="http://schemas.openxmlformats.org/officeDocument/2006/relationships" xmlns:p="http://schemas.openxmlformats.org/presentationml/2006/main">
+  <p:cSld name="Slide 6">
+    <p:bg>
+      <p:bgPr>
+        <a:solidFill>
+          <a:srgbClr val="FFFFFF"/>
+        </a:solidFill>
+      </p:bgPr>
+    </p:bg>
+    <p:spTree>
+      <p:nvGrpSpPr>
+        <p:cNvPr id="1" name=""/>
+        <p:cNvGrpSpPr/>
+        <p:nvPr/>
+      </p:nvGrpSpPr>
+      <p:grpSpPr>
+        <a:xfrm>
+          <a:off x="0" y="0"/>
+          <a:ext cx="0" cy="0"/>
+          <a:chOff x="0" y="0"/>
+          <a:chExt cx="0" cy="0"/>
+        </a:xfrm>
+      </p:grpSpPr>
+      <p:sp>
+        <p:nvSpPr>
+          <p:cNvPr id="2" name="Text 0"/>
+          <p:cNvSpPr txBox="1"/>
+          <p:nvPr/>
+        </p:nvSpPr>
+        <p:spPr>
+          <a:xfrm>
+            <a:off x="548640" y="274320"/>
+            <a:ext cx="11064240" cy="411480"/>
+          </a:xfrm>
+          <a:prstGeom prst="rect">
+            <a:avLst/>
+          </a:prstGeom>
+          <a:noFill/>
+          <a:ln/>
+        </p:spPr>
+        <p:txBody>
+          <a:bodyPr wrap="square" lIns="0" tIns="0" rIns="0" bIns="0" rtlCol="0" anchor="ctr"/>
+          <a:lstStyle/>
+          <a:p>
+            <a:pPr indent="0" marL="0">
+              <a:buNone/>
+            </a:pPr>
+            <a:r>
+              <a:rPr lang="en-US" sz="2800" b="1" dirty="0">
+                <a:solidFill>
+                  <a:srgbClr val="1D2D3E"/>
+                </a:solidFill>
+                <a:latin typeface="Arial" pitchFamily="34" charset="0"/>
+                <a:ea typeface="Arial" pitchFamily="34" charset="-122"/>
+                <a:cs typeface="Arial" pitchFamily="34" charset="-120"/>
+              </a:rPr>
+              <a:t>Without SAP BTP — how a request flows</a:t>
+            </a:r>
+            <a:endParaRPr lang="en-US" sz="2800" dirty="0"/>
+          </a:p>
+        </p:txBody>
+      </p:sp>
+      <p:sp>
+        <p:nvSpPr>
+          <p:cNvPr id="3" name="Text 1"/>
+          <p:cNvSpPr txBox="1"/>
+          <p:nvPr/>
+        </p:nvSpPr>
+        <p:spPr>
+          <a:xfrm>
+            <a:off x="548640" y="685800"/>
+            <a:ext cx="11064240" cy="256032"/>
+          </a:xfrm>
+          <a:prstGeom prst="rect">
+            <a:avLst/>
+          </a:prstGeom>
+          <a:noFill/>
+          <a:ln/>
+        </p:spPr>
+        <p:txBody>
+          <a:bodyPr wrap="square" lIns="0" tIns="0" rIns="0" bIns="0" rtlCol="0" anchor="ctr"/>
+          <a:lstStyle/>
+          <a:p>
+            <a:pPr indent="0" marL="0">
+              <a:buNone/>
+            </a:pPr>
+            <a:r>
+              <a:rPr lang="en-US" sz="1100" dirty="0">
+                <a:solidFill>
+                  <a:srgbClr val="556B82"/>
+                </a:solidFill>
+                <a:latin typeface="Arial" pitchFamily="34" charset="0"/>
+                <a:ea typeface="Arial" pitchFamily="34" charset="-122"/>
+                <a:cs typeface="Arial" pitchFamily="34" charset="-120"/>
+              </a:rPr>
+              <a:t>Numbered steps match the diagram on the previous slide</a:t>
+            </a:r>
+            <a:endParaRPr lang="en-US" sz="1100" dirty="0"/>
+          </a:p>
+        </p:txBody>
+      </p:sp>
+      <p:sp>
+        <p:nvSpPr>
+          <p:cNvPr id="4" name="Shape 2"/>
+          <p:cNvSpPr/>
+          <p:nvPr/>
+        </p:nvSpPr>
+        <p:spPr>
+          <a:xfrm>
+            <a:off x="548640" y="1234440"/>
+            <a:ext cx="5394960" cy="1097280"/>
+          </a:xfrm>
+          <a:prstGeom prst="roundRect">
+            <a:avLst>
+              <a:gd name="adj" fmla="val 6667"/>
+            </a:avLst>
+          </a:prstGeom>
+          <a:solidFill>
+            <a:srgbClr val="F5F6F7"/>
+          </a:solidFill>
+          <a:ln w="9525">
+            <a:solidFill>
+              <a:srgbClr val="E1E6EB"/>
+            </a:solidFill>
+            <a:prstDash val="solid"/>
+          </a:ln>
+        </p:spPr>
+      </p:sp>
+      <p:sp>
+        <p:nvSpPr>
+          <p:cNvPr id="5" name="Text 3"/>
+          <p:cNvSpPr/>
+          <p:nvPr/>
+        </p:nvSpPr>
+        <p:spPr>
+          <a:xfrm>
+            <a:off x="777240" y="1508760"/>
+            <a:ext cx="420624" cy="420624"/>
+          </a:xfrm>
+          <a:prstGeom prst="ellipse">
+            <a:avLst/>
+          </a:prstGeom>
+          <a:solidFill>
+            <a:srgbClr val="1D2D3E"/>
+          </a:solidFill>
+          <a:ln/>
+        </p:spPr>
+        <p:txBody>
+          <a:bodyPr wrap="square" lIns="0" tIns="0" rIns="0" bIns="0" rtlCol="0" anchor="ctr"/>
+          <a:lstStyle/>
+          <a:p>
+            <a:pPr algn="ctr" indent="0" marL="0">
+              <a:buNone/>
+            </a:pPr>
+            <a:r>
+              <a:rPr lang="en-US" sz="1500" b="1" dirty="0">
+                <a:solidFill>
+                  <a:srgbClr val="FFFFFF"/>
+                </a:solidFill>
+                <a:latin typeface="Arial" pitchFamily="34" charset="0"/>
+                <a:ea typeface="Arial" pitchFamily="34" charset="-122"/>
+                <a:cs typeface="Arial" pitchFamily="34" charset="-120"/>
+              </a:rPr>
+              <a:t>1</a:t>
+            </a:r>
+            <a:endParaRPr lang="en-US" sz="1500" dirty="0"/>
+          </a:p>
+        </p:txBody>
+      </p:sp>
+      <p:sp>
+        <p:nvSpPr>
+          <p:cNvPr id="6" name="Text 4"/>
+          <p:cNvSpPr txBox="1"/>
+          <p:nvPr/>
+        </p:nvSpPr>
+        <p:spPr>
+          <a:xfrm>
+            <a:off x="1417320" y="1399032"/>
+            <a:ext cx="4297680" cy="292608"/>
+          </a:xfrm>
+          <a:prstGeom prst="rect">
+            <a:avLst/>
+          </a:prstGeom>
+          <a:noFill/>
+          <a:ln/>
+        </p:spPr>
+        <p:txBody>
+          <a:bodyPr wrap="square" lIns="0" tIns="0" rIns="0" bIns="0" rtlCol="0" anchor="ctr"/>
+          <a:lstStyle/>
+          <a:p>
+            <a:pPr indent="0" marL="0">
+              <a:buNone/>
+            </a:pPr>
+            <a:r>
+              <a:rPr lang="en-US" sz="1400" b="1" dirty="0">
+                <a:solidFill>
+                  <a:srgbClr val="1D2D3E"/>
+                </a:solidFill>
+                <a:latin typeface="Arial" pitchFamily="34" charset="0"/>
+                <a:ea typeface="Arial" pitchFamily="34" charset="-122"/>
+                <a:cs typeface="Arial" pitchFamily="34" charset="-120"/>
+              </a:rPr>
+              <a:t>MCP request</a:t>
+            </a:r>
+            <a:endParaRPr lang="en-US" sz="1400" dirty="0"/>
+          </a:p>
+        </p:txBody>
+      </p:sp>
+      <p:sp>
+        <p:nvSpPr>
+          <p:cNvPr id="7" name="Text 5"/>
+          <p:cNvSpPr txBox="1"/>
+          <p:nvPr/>
+        </p:nvSpPr>
+        <p:spPr>
+          <a:xfrm>
+            <a:off x="1417320" y="1709928"/>
+            <a:ext cx="4297680" cy="640080"/>
+          </a:xfrm>
+          <a:prstGeom prst="rect">
+            <a:avLst/>
+          </a:prstGeom>
+          <a:noFill/>
+          <a:ln/>
+        </p:spPr>
+        <p:txBody>
+          <a:bodyPr wrap="square" lIns="0" tIns="0" rIns="0" bIns="0" rtlCol="0" anchor="t"/>
+          <a:lstStyle/>
+          <a:p>
+            <a:pPr indent="0" marL="0">
+              <a:buNone/>
+            </a:pPr>
+            <a:r>
+              <a:rPr lang="en-US" sz="1100" dirty="0">
+                <a:solidFill>
+                  <a:srgbClr val="556B82"/>
+                </a:solidFill>
+                <a:latin typeface="Arial" pitchFamily="34" charset="0"/>
+                <a:ea typeface="Arial" pitchFamily="34" charset="-122"/>
+                <a:cs typeface="Arial" pitchFamily="34" charset="-120"/>
+              </a:rPr>
+              <a:t>Clients reach the Node.js server through a reverse proxy that terminates TLS. /mcp requires a bearer token.</a:t>
+            </a:r>
+            <a:endParaRPr lang="en-US" sz="1100" dirty="0"/>
+          </a:p>
+        </p:txBody>
+      </p:sp>
+      <p:sp>
+        <p:nvSpPr>
+          <p:cNvPr id="8" name="Shape 6"/>
+          <p:cNvSpPr/>
+          <p:nvPr/>
+        </p:nvSpPr>
+        <p:spPr>
+          <a:xfrm>
+            <a:off x="548640" y="2532888"/>
+            <a:ext cx="5394960" cy="1097280"/>
+          </a:xfrm>
+          <a:prstGeom prst="roundRect">
+            <a:avLst>
+              <a:gd name="adj" fmla="val 6667"/>
+            </a:avLst>
+          </a:prstGeom>
+          <a:solidFill>
+            <a:srgbClr val="F5F6F7"/>
+          </a:solidFill>
+          <a:ln w="9525">
+            <a:solidFill>
+              <a:srgbClr val="E1E6EB"/>
+            </a:solidFill>
+            <a:prstDash val="solid"/>
+          </a:ln>
+        </p:spPr>
+      </p:sp>
+      <p:sp>
+        <p:nvSpPr>
+          <p:cNvPr id="9" name="Text 7"/>
+          <p:cNvSpPr/>
+          <p:nvPr/>
+        </p:nvSpPr>
+        <p:spPr>
+          <a:xfrm>
+            <a:off x="777240" y="2807208"/>
+            <a:ext cx="420624" cy="420624"/>
+          </a:xfrm>
+          <a:prstGeom prst="ellipse">
+            <a:avLst/>
+          </a:prstGeom>
+          <a:solidFill>
+            <a:srgbClr val="1D2D3E"/>
+          </a:solidFill>
+          <a:ln/>
+        </p:spPr>
+        <p:txBody>
+          <a:bodyPr wrap="square" lIns="0" tIns="0" rIns="0" bIns="0" rtlCol="0" anchor="ctr"/>
+          <a:lstStyle/>
+          <a:p>
+            <a:pPr algn="ctr" indent="0" marL="0">
+              <a:buNone/>
+            </a:pPr>
+            <a:r>
+              <a:rPr lang="en-US" sz="1500" b="1" dirty="0">
+                <a:solidFill>
+                  <a:srgbClr val="FFFFFF"/>
+                </a:solidFill>
+                <a:latin typeface="Arial" pitchFamily="34" charset="0"/>
+                <a:ea typeface="Arial" pitchFamily="34" charset="-122"/>
+                <a:cs typeface="Arial" pitchFamily="34" charset="-120"/>
+              </a:rPr>
+              <a:t>2</a:t>
+            </a:r>
+            <a:endParaRPr lang="en-US" sz="1500" dirty="0"/>
+          </a:p>
+        </p:txBody>
+      </p:sp>
+      <p:sp>
+        <p:nvSpPr>
+          <p:cNvPr id="10" name="Text 8"/>
+          <p:cNvSpPr txBox="1"/>
+          <p:nvPr/>
+        </p:nvSpPr>
+        <p:spPr>
+          <a:xfrm>
+            <a:off x="1417320" y="2697480"/>
+            <a:ext cx="4297680" cy="292608"/>
+          </a:xfrm>
+          <a:prstGeom prst="rect">
+            <a:avLst/>
+          </a:prstGeom>
+          <a:noFill/>
+          <a:ln/>
+        </p:spPr>
+        <p:txBody>
+          <a:bodyPr wrap="square" lIns="0" tIns="0" rIns="0" bIns="0" rtlCol="0" anchor="ctr"/>
+          <a:lstStyle/>
+          <a:p>
+            <a:pPr indent="0" marL="0">
+              <a:buNone/>
+            </a:pPr>
+            <a:r>
+              <a:rPr lang="en-US" sz="1400" b="1" dirty="0">
+                <a:solidFill>
+                  <a:srgbClr val="1D2D3E"/>
+                </a:solidFill>
+                <a:latin typeface="Arial" pitchFamily="34" charset="0"/>
+                <a:ea typeface="Arial" pitchFamily="34" charset="-122"/>
+                <a:cs typeface="Arial" pitchFamily="34" charset="-120"/>
+              </a:rPr>
+              <a:t>Single sign-on with any OIDC IdP</a:t>
+            </a:r>
+            <a:endParaRPr lang="en-US" sz="1400" dirty="0"/>
+          </a:p>
+        </p:txBody>
+      </p:sp>
+      <p:sp>
+        <p:nvSpPr>
+          <p:cNvPr id="11" name="Text 9"/>
+          <p:cNvSpPr txBox="1"/>
+          <p:nvPr/>
+        </p:nvSpPr>
+        <p:spPr>
+          <a:xfrm>
+            <a:off x="1417320" y="3008376"/>
+            <a:ext cx="4297680" cy="640080"/>
+          </a:xfrm>
+          <a:prstGeom prst="rect">
+            <a:avLst/>
+          </a:prstGeom>
+          <a:noFill/>
+          <a:ln/>
+        </p:spPr>
+        <p:txBody>
+          <a:bodyPr wrap="square" lIns="0" tIns="0" rIns="0" bIns="0" rtlCol="0" anchor="t"/>
+          <a:lstStyle/>
+          <a:p>
+            <a:pPr indent="0" marL="0">
+              <a:buNone/>
+            </a:pPr>
+            <a:r>
+              <a:rPr lang="en-US" sz="1100" dirty="0">
+                <a:solidFill>
+                  <a:srgbClr val="556B82"/>
+                </a:solidFill>
+                <a:latin typeface="Arial" pitchFamily="34" charset="0"/>
+                <a:ea typeface="Arial" pitchFamily="34" charset="-122"/>
+                <a:cs typeface="Arial" pitchFamily="34" charset="-120"/>
+              </a:rPr>
+              <a:t>/oauth/* proxies the login to Entra ID, Okta, Keycloak, SAP IAS, … Tokens are verified against the IdP's JWKS.</a:t>
+            </a:r>
+            <a:endParaRPr lang="en-US" sz="1100" dirty="0"/>
+          </a:p>
+        </p:txBody>
+      </p:sp>
+      <p:sp>
+        <p:nvSpPr>
+          <p:cNvPr id="12" name="Shape 10"/>
+          <p:cNvSpPr/>
+          <p:nvPr/>
+        </p:nvSpPr>
+        <p:spPr>
+          <a:xfrm>
+            <a:off x="548640" y="3831336"/>
+            <a:ext cx="5394960" cy="1097280"/>
+          </a:xfrm>
+          <a:prstGeom prst="roundRect">
+            <a:avLst>
+              <a:gd name="adj" fmla="val 6667"/>
+            </a:avLst>
+          </a:prstGeom>
+          <a:solidFill>
+            <a:srgbClr val="F5F6F7"/>
+          </a:solidFill>
+          <a:ln w="9525">
+            <a:solidFill>
+              <a:srgbClr val="E1E6EB"/>
+            </a:solidFill>
+            <a:prstDash val="solid"/>
+          </a:ln>
+        </p:spPr>
+      </p:sp>
+      <p:sp>
+        <p:nvSpPr>
+          <p:cNvPr id="13" name="Text 11"/>
+          <p:cNvSpPr/>
+          <p:nvPr/>
+        </p:nvSpPr>
+        <p:spPr>
+          <a:xfrm>
+            <a:off x="777240" y="4105656"/>
+            <a:ext cx="420624" cy="420624"/>
+          </a:xfrm>
+          <a:prstGeom prst="ellipse">
+            <a:avLst/>
+          </a:prstGeom>
+          <a:solidFill>
+            <a:srgbClr val="1D2D3E"/>
+          </a:solidFill>
+          <a:ln/>
+        </p:spPr>
+        <p:txBody>
+          <a:bodyPr wrap="square" lIns="0" tIns="0" rIns="0" bIns="0" rtlCol="0" anchor="ctr"/>
+          <a:lstStyle/>
+          <a:p>
+            <a:pPr algn="ctr" indent="0" marL="0">
+              <a:buNone/>
+            </a:pPr>
+            <a:r>
+              <a:rPr lang="en-US" sz="1500" b="1" dirty="0">
+                <a:solidFill>
+                  <a:srgbClr val="FFFFFF"/>
+                </a:solidFill>
+                <a:latin typeface="Arial" pitchFamily="34" charset="0"/>
+                <a:ea typeface="Arial" pitchFamily="34" charset="-122"/>
+                <a:cs typeface="Arial" pitchFamily="34" charset="-120"/>
+              </a:rPr>
+              <a:t>3</a:t>
+            </a:r>
+            <a:endParaRPr lang="en-US" sz="1500" dirty="0"/>
+          </a:p>
+        </p:txBody>
+      </p:sp>
+      <p:sp>
+        <p:nvSpPr>
+          <p:cNvPr id="14" name="Text 12"/>
+          <p:cNvSpPr txBox="1"/>
+          <p:nvPr/>
+        </p:nvSpPr>
+        <p:spPr>
+          <a:xfrm>
+            <a:off x="1417320" y="3995928"/>
+            <a:ext cx="4297680" cy="292608"/>
+          </a:xfrm>
+          <a:prstGeom prst="rect">
+            <a:avLst/>
+          </a:prstGeom>
+          <a:noFill/>
+          <a:ln/>
+        </p:spPr>
+        <p:txBody>
+          <a:bodyPr wrap="square" lIns="0" tIns="0" rIns="0" bIns="0" rtlCol="0" anchor="ctr"/>
+          <a:lstStyle/>
+          <a:p>
+            <a:pPr indent="0" marL="0">
+              <a:buNone/>
+            </a:pPr>
+            <a:r>
+              <a:rPr lang="en-US" sz="1400" b="1" dirty="0">
+                <a:solidFill>
+                  <a:srgbClr val="1D2D3E"/>
+                </a:solidFill>
+                <a:latin typeface="Arial" pitchFamily="34" charset="0"/>
+                <a:ea typeface="Arial" pitchFamily="34" charset="-122"/>
+                <a:cs typeface="Arial" pitchFamily="34" charset="-120"/>
+              </a:rPr>
+              <a:t>SAML bearer to SAP</a:t>
+            </a:r>
+            <a:endParaRPr lang="en-US" sz="1400" dirty="0"/>
+          </a:p>
+        </p:txBody>
+      </p:sp>
+      <p:sp>
+        <p:nvSpPr>
+          <p:cNvPr id="15" name="Text 13"/>
+          <p:cNvSpPr txBox="1"/>
+          <p:nvPr/>
+        </p:nvSpPr>
+        <p:spPr>
+          <a:xfrm>
+            <a:off x="1417320" y="4306824"/>
+            <a:ext cx="4297680" cy="640080"/>
+          </a:xfrm>
+          <a:prstGeom prst="rect">
+            <a:avLst/>
+          </a:prstGeom>
+          <a:noFill/>
+          <a:ln/>
+        </p:spPr>
+        <p:txBody>
+          <a:bodyPr wrap="square" lIns="0" tIns="0" rIns="0" bIns="0" rtlCol="0" anchor="t"/>
+          <a:lstStyle/>
+          <a:p>
+            <a:pPr indent="0" marL="0">
+              <a:buNone/>
+            </a:pPr>
+            <a:r>
+              <a:rPr lang="en-US" sz="1100" dirty="0">
+                <a:solidFill>
+                  <a:srgbClr val="556B82"/>
+                </a:solidFill>
+                <a:latin typeface="Arial" pitchFamily="34" charset="0"/>
+                <a:ea typeface="Arial" pitchFamily="34" charset="-122"/>
+                <a:cs typeface="Arial" pitchFamily="34" charset="-120"/>
+              </a:rPr>
+              <a:t>The proxy signs a SAML assertion for the user with the key from the secret store and exchanges it at SAP's OAuth server.</a:t>
+            </a:r>
+            <a:endParaRPr lang="en-US" sz="1100" dirty="0"/>
+          </a:p>
+        </p:txBody>
+      </p:sp>
+      <p:sp>
+        <p:nvSpPr>
+          <p:cNvPr id="16" name="Shape 14"/>
+          <p:cNvSpPr/>
+          <p:nvPr/>
+        </p:nvSpPr>
+        <p:spPr>
+          <a:xfrm>
+            <a:off x="6245352" y="1234440"/>
+            <a:ext cx="5394960" cy="1097280"/>
+          </a:xfrm>
+          <a:prstGeom prst="roundRect">
+            <a:avLst>
+              <a:gd name="adj" fmla="val 6667"/>
+            </a:avLst>
+          </a:prstGeom>
+          <a:solidFill>
+            <a:srgbClr val="F5F6F7"/>
+          </a:solidFill>
+          <a:ln w="9525">
+            <a:solidFill>
+              <a:srgbClr val="E1E6EB"/>
+            </a:solidFill>
+            <a:prstDash val="solid"/>
+          </a:ln>
+        </p:spPr>
+      </p:sp>
+      <p:sp>
+        <p:nvSpPr>
+          <p:cNvPr id="17" name="Text 15"/>
+          <p:cNvSpPr/>
+          <p:nvPr/>
+        </p:nvSpPr>
+        <p:spPr>
+          <a:xfrm>
+            <a:off x="6473952" y="1508760"/>
+            <a:ext cx="420624" cy="420624"/>
+          </a:xfrm>
+          <a:prstGeom prst="ellipse">
+            <a:avLst/>
+          </a:prstGeom>
+          <a:solidFill>
+            <a:srgbClr val="1D2D3E"/>
+          </a:solidFill>
+          <a:ln/>
+        </p:spPr>
+        <p:txBody>
+          <a:bodyPr wrap="square" lIns="0" tIns="0" rIns="0" bIns="0" rtlCol="0" anchor="ctr"/>
+          <a:lstStyle/>
+          <a:p>
+            <a:pPr algn="ctr" indent="0" marL="0">
+              <a:buNone/>
+            </a:pPr>
+            <a:r>
+              <a:rPr lang="en-US" sz="1500" b="1" dirty="0">
+                <a:solidFill>
+                  <a:srgbClr val="FFFFFF"/>
+                </a:solidFill>
+                <a:latin typeface="Arial" pitchFamily="34" charset="0"/>
+                <a:ea typeface="Arial" pitchFamily="34" charset="-122"/>
+                <a:cs typeface="Arial" pitchFamily="34" charset="-120"/>
+              </a:rPr>
+              <a:t>4</a:t>
+            </a:r>
+            <a:endParaRPr lang="en-US" sz="1500" dirty="0"/>
+          </a:p>
+        </p:txBody>
+      </p:sp>
+      <p:sp>
+        <p:nvSpPr>
+          <p:cNvPr id="18" name="Text 16"/>
+          <p:cNvSpPr txBox="1"/>
+          <p:nvPr/>
+        </p:nvSpPr>
+        <p:spPr>
+          <a:xfrm>
+            <a:off x="7114032" y="1399032"/>
+            <a:ext cx="4297680" cy="292608"/>
+          </a:xfrm>
+          <a:prstGeom prst="rect">
+            <a:avLst/>
+          </a:prstGeom>
+          <a:noFill/>
+          <a:ln/>
+        </p:spPr>
+        <p:txBody>
+          <a:bodyPr wrap="square" lIns="0" tIns="0" rIns="0" bIns="0" rtlCol="0" anchor="ctr"/>
+          <a:lstStyle/>
+          <a:p>
+            <a:pPr indent="0" marL="0">
+              <a:buNone/>
+            </a:pPr>
+            <a:r>
+              <a:rPr lang="en-US" sz="1400" b="1" dirty="0">
+                <a:solidFill>
+                  <a:srgbClr val="1D2D3E"/>
+                </a:solidFill>
+                <a:latin typeface="Arial" pitchFamily="34" charset="0"/>
+                <a:ea typeface="Arial" pitchFamily="34" charset="-122"/>
+                <a:cs typeface="Arial" pitchFamily="34" charset="-120"/>
+              </a:rPr>
+              <a:t>OData as the business user</a:t>
+            </a:r>
+            <a:endParaRPr lang="en-US" sz="1400" dirty="0"/>
+          </a:p>
+        </p:txBody>
+      </p:sp>
+      <p:sp>
+        <p:nvSpPr>
+          <p:cNvPr id="19" name="Text 17"/>
+          <p:cNvSpPr txBox="1"/>
+          <p:nvPr/>
+        </p:nvSpPr>
+        <p:spPr>
+          <a:xfrm>
+            <a:off x="7114032" y="1709928"/>
+            <a:ext cx="4297680" cy="640080"/>
+          </a:xfrm>
+          <a:prstGeom prst="rect">
+            <a:avLst/>
+          </a:prstGeom>
+          <a:noFill/>
+          <a:ln/>
+        </p:spPr>
+        <p:txBody>
+          <a:bodyPr wrap="square" lIns="0" tIns="0" rIns="0" bIns="0" rtlCol="0" anchor="t"/>
+          <a:lstStyle/>
+          <a:p>
+            <a:pPr indent="0" marL="0">
+              <a:buNone/>
+            </a:pPr>
+            <a:r>
+              <a:rPr lang="en-US" sz="1100" dirty="0">
+                <a:solidFill>
+                  <a:srgbClr val="556B82"/>
+                </a:solidFill>
+                <a:latin typeface="Arial" pitchFamily="34" charset="0"/>
+                <a:ea typeface="Arial" pitchFamily="34" charset="-122"/>
+                <a:cs typeface="Arial" pitchFamily="34" charset="-120"/>
+              </a:rPr>
+              <a:t>The S/4HANA call carries the user's own SAP token, so SAP authorizations apply per user. Tokens are cached per user.</a:t>
+            </a:r>
+            <a:endParaRPr lang="en-US" sz="1100" dirty="0"/>
+          </a:p>
+        </p:txBody>
+      </p:sp>
+      <p:sp>
+        <p:nvSpPr>
+          <p:cNvPr id="20" name="Shape 18"/>
+          <p:cNvSpPr/>
+          <p:nvPr/>
+        </p:nvSpPr>
+        <p:spPr>
+          <a:xfrm>
+            <a:off x="6245352" y="2532888"/>
+            <a:ext cx="5394960" cy="1097280"/>
+          </a:xfrm>
+          <a:prstGeom prst="roundRect">
+            <a:avLst>
+              <a:gd name="adj" fmla="val 6667"/>
+            </a:avLst>
+          </a:prstGeom>
+          <a:solidFill>
+            <a:srgbClr val="F5F6F7"/>
+          </a:solidFill>
+          <a:ln w="9525">
+            <a:solidFill>
+              <a:srgbClr val="E1E6EB"/>
+            </a:solidFill>
+            <a:prstDash val="solid"/>
+          </a:ln>
+        </p:spPr>
+      </p:sp>
+      <p:sp>
+        <p:nvSpPr>
+          <p:cNvPr id="21" name="Text 19"/>
+          <p:cNvSpPr/>
+          <p:nvPr/>
+        </p:nvSpPr>
+        <p:spPr>
+          <a:xfrm>
+            <a:off x="6473952" y="2807208"/>
+            <a:ext cx="420624" cy="420624"/>
+          </a:xfrm>
+          <a:prstGeom prst="ellipse">
+            <a:avLst/>
+          </a:prstGeom>
+          <a:solidFill>
+            <a:srgbClr val="1D2D3E"/>
+          </a:solidFill>
+          <a:ln/>
+        </p:spPr>
+        <p:txBody>
+          <a:bodyPr wrap="square" lIns="0" tIns="0" rIns="0" bIns="0" rtlCol="0" anchor="ctr"/>
+          <a:lstStyle/>
+          <a:p>
+            <a:pPr algn="ctr" indent="0" marL="0">
+              <a:buNone/>
+            </a:pPr>
+            <a:r>
+              <a:rPr lang="en-US" sz="1500" b="1" dirty="0">
+                <a:solidFill>
+                  <a:srgbClr val="FFFFFF"/>
+                </a:solidFill>
+                <a:latin typeface="Arial" pitchFamily="34" charset="0"/>
+                <a:ea typeface="Arial" pitchFamily="34" charset="-122"/>
+                <a:cs typeface="Arial" pitchFamily="34" charset="-120"/>
+              </a:rPr>
+              <a:t>5</a:t>
+            </a:r>
+            <a:endParaRPr lang="en-US" sz="1500" dirty="0"/>
+          </a:p>
+        </p:txBody>
+      </p:sp>
+      <p:sp>
+        <p:nvSpPr>
+          <p:cNvPr id="22" name="Text 20"/>
+          <p:cNvSpPr txBox="1"/>
+          <p:nvPr/>
+        </p:nvSpPr>
+        <p:spPr>
+          <a:xfrm>
+            <a:off x="7114032" y="2697480"/>
+            <a:ext cx="4297680" cy="292608"/>
+          </a:xfrm>
+          <a:prstGeom prst="rect">
+            <a:avLst/>
+          </a:prstGeom>
+          <a:noFill/>
+          <a:ln/>
+        </p:spPr>
+        <p:txBody>
+          <a:bodyPr wrap="square" lIns="0" tIns="0" rIns="0" bIns="0" rtlCol="0" anchor="ctr"/>
+          <a:lstStyle/>
+          <a:p>
+            <a:pPr indent="0" marL="0">
+              <a:buNone/>
+            </a:pPr>
+            <a:r>
+              <a:rPr lang="en-US" sz="1400" b="1" dirty="0">
+                <a:solidFill>
+                  <a:srgbClr val="1D2D3E"/>
+                </a:solidFill>
+                <a:latin typeface="Arial" pitchFamily="34" charset="0"/>
+                <a:ea typeface="Arial" pitchFamily="34" charset="-122"/>
+                <a:cs typeface="Arial" pitchFamily="34" charset="-120"/>
+              </a:rPr>
+              <a:t>More SAP systems</a:t>
+            </a:r>
+            <a:endParaRPr lang="en-US" sz="1400" dirty="0"/>
+          </a:p>
+        </p:txBody>
+      </p:sp>
+      <p:sp>
+        <p:nvSpPr>
+          <p:cNvPr id="23" name="Text 21"/>
+          <p:cNvSpPr txBox="1"/>
+          <p:nvPr/>
+        </p:nvSpPr>
+        <p:spPr>
+          <a:xfrm>
+            <a:off x="7114032" y="3008376"/>
+            <a:ext cx="4297680" cy="640080"/>
+          </a:xfrm>
+          <a:prstGeom prst="rect">
+            <a:avLst/>
+          </a:prstGeom>
+          <a:noFill/>
+          <a:ln/>
+        </p:spPr>
+        <p:txBody>
+          <a:bodyPr wrap="square" lIns="0" tIns="0" rIns="0" bIns="0" rtlCol="0" anchor="t"/>
+          <a:lstStyle/>
+          <a:p>
+            <a:pPr indent="0" marL="0">
+              <a:buNone/>
+            </a:pPr>
+            <a:r>
+              <a:rPr lang="en-US" sz="1100" dirty="0">
+                <a:solidFill>
+                  <a:srgbClr val="556B82"/>
+                </a:solidFill>
+                <a:latin typeface="Arial" pitchFamily="34" charset="0"/>
+                <a:ea typeface="Arial" pitchFamily="34" charset="-122"/>
+                <a:cs typeface="Arial" pitchFamily="34" charset="-120"/>
+              </a:rPr>
+              <a:t>Every ABAP system is a separate destination with its own trust set-up and AUTH_TYPE (per user or technical user).</a:t>
+            </a:r>
+            <a:endParaRPr lang="en-US" sz="1100" dirty="0"/>
+          </a:p>
+        </p:txBody>
+      </p:sp>
+      <p:sp>
+        <p:nvSpPr>
+          <p:cNvPr id="24" name="Shape 22"/>
+          <p:cNvSpPr/>
+          <p:nvPr/>
+        </p:nvSpPr>
+        <p:spPr>
+          <a:xfrm>
+            <a:off x="548640" y="5175504"/>
+            <a:ext cx="11091672" cy="502920"/>
+          </a:xfrm>
+          <a:prstGeom prst="roundRect">
+            <a:avLst>
+              <a:gd name="adj" fmla="val 14545"/>
+            </a:avLst>
+          </a:prstGeom>
+          <a:solidFill>
+            <a:srgbClr val="EBF8FF"/>
+          </a:solidFill>
+          <a:ln w="9525">
+            <a:solidFill>
+              <a:srgbClr val="0070F2"/>
+            </a:solidFill>
+            <a:prstDash val="solid"/>
+          </a:ln>
+        </p:spPr>
+      </p:sp>
+      <p:sp>
+        <p:nvSpPr>
+          <p:cNvPr id="25" name="Text 23"/>
+          <p:cNvSpPr txBox="1"/>
+          <p:nvPr/>
+        </p:nvSpPr>
+        <p:spPr>
+          <a:xfrm>
+            <a:off x="777240" y="5175504"/>
+            <a:ext cx="10634472" cy="502920"/>
+          </a:xfrm>
+          <a:prstGeom prst="rect">
+            <a:avLst/>
+          </a:prstGeom>
+          <a:noFill/>
+          <a:ln/>
+        </p:spPr>
+        <p:txBody>
+          <a:bodyPr wrap="square" lIns="0" tIns="0" rIns="0" bIns="0" rtlCol="0" anchor="ctr"/>
+          <a:lstStyle/>
+          <a:p>
+            <a:pPr indent="0" marL="0">
+              <a:buNone/>
+            </a:pPr>
+            <a:r>
+              <a:rPr lang="en-US" sz="1100" b="1" dirty="0">
+                <a:solidFill>
+                  <a:srgbClr val="0070F2"/>
+                </a:solidFill>
+                <a:latin typeface="Arial" pitchFamily="34" charset="0"/>
+                <a:ea typeface="Arial" pitchFamily="34" charset="-122"/>
+                <a:cs typeface="Arial" pitchFamily="34" charset="-120"/>
+              </a:rPr>
+              <a:t>No SAP BTP needed:  </a:t>
+            </a:r>
+            <a:pPr indent="0" marL="0">
+              <a:buNone/>
+            </a:pPr>
+            <a:r>
+              <a:rPr lang="en-US" sz="1100" dirty="0">
+                <a:solidFill>
+                  <a:srgbClr val="1D2D3E"/>
+                </a:solidFill>
+                <a:latin typeface="Arial" pitchFamily="34" charset="0"/>
+                <a:ea typeface="Arial" pitchFamily="34" charset="-122"/>
+                <a:cs typeface="Arial" pitchFamily="34" charset="-120"/>
+              </a:rPr>
+              <a:t>no Destination service, Connectivity, Cloud Connector or XSUAA. Just an OIDC IdP, a Node.js host and SAML2 trust in each SAP system.</a:t>
             </a:r>
             <a:endParaRPr lang="en-US" sz="1100" dirty="0"/>
           </a:p>
